--- a/courses/build/farmer-money/R-D1.pptx
+++ b/courses/build/farmer-money/R-D1.pptx
@@ -5031,7 +5031,7 @@
     <p:bg>
       <p:bgPr>
         <a:solidFill>
-          <a:srgbClr val="1F4D2B"/>
+          <a:srgbClr val="4B2E4F"/>
         </a:solidFill>
         <a:effectLst/>
       </p:bgPr>
@@ -5073,9 +5073,9 @@
             <a:r>
               <a:rPr sz="1000" b="0">
                 <a:solidFill>
-                  <a:srgbClr val="A8D88A"/>
-                </a:solidFill>
-                <a:latin typeface="Arial"/>
+                  <a:srgbClr val="FFF4E0"/>
+                </a:solidFill>
+                <a:latin typeface="Calibri"/>
               </a:rPr>
               <a:t>R-D1-01</a:t>
             </a:r>
@@ -5112,9 +5112,9 @@
             <a:r>
               <a:rPr sz="1000" b="0">
                 <a:solidFill>
-                  <a:srgbClr val="A8D88A"/>
-                </a:solidFill>
-                <a:latin typeface="Arial"/>
+                  <a:srgbClr val="FFF4E0"/>
+                </a:solidFill>
+                <a:latin typeface="Calibri"/>
               </a:rPr>
               <a:t>Farmer Money</a:t>
             </a:r>
@@ -5151,9 +5151,9 @@
             <a:r>
               <a:rPr sz="4800" b="1">
                 <a:solidFill>
-                  <a:srgbClr val="F7F2E9"/>
-                </a:solidFill>
-                <a:latin typeface="Georgia"/>
+                  <a:srgbClr val="FFF4E0"/>
+                </a:solidFill>
+                <a:latin typeface="Arial Rounded MT Bold"/>
               </a:rPr>
               <a:t>Welcome</a:t>
             </a:r>
@@ -5175,7 +5175,7 @@
             <a:avLst/>
           </a:prstGeom>
           <a:solidFill>
-            <a:srgbClr val="C07A1E"/>
+            <a:srgbClr val="2A8C82"/>
           </a:solidFill>
           <a:ln>
             <a:noFill/>
@@ -5234,9 +5234,9 @@
             <a:r>
               <a:rPr sz="2400" b="0">
                 <a:solidFill>
-                  <a:srgbClr val="A8D88A"/>
-                </a:solidFill>
-                <a:latin typeface="Arial"/>
+                  <a:srgbClr val="FFF4E0"/>
+                </a:solidFill>
+                <a:latin typeface="Calibri"/>
               </a:rPr>
               <a:t>Farmer Money</a:t>
             </a:r>
@@ -5250,9 +5250,9 @@
             <a:r>
               <a:rPr sz="2400" b="0">
                 <a:solidFill>
-                  <a:srgbClr val="A8D88A"/>
-                </a:solidFill>
-                <a:latin typeface="Arial"/>
+                  <a:srgbClr val="FFF4E0"/>
+                </a:solidFill>
+                <a:latin typeface="Calibri"/>
               </a:rPr>
               <a:t>Day 1 of 3 · Household money</a:t>
             </a:r>
@@ -5274,11 +5274,11 @@
             <a:avLst/>
           </a:prstGeom>
           <a:solidFill>
-            <a:srgbClr val="FBF6EC"/>
+            <a:srgbClr val="FFF4E0"/>
           </a:solidFill>
           <a:ln w="15875">
             <a:solidFill>
-              <a:srgbClr val="E2D8C4"/>
+              <a:srgbClr val="E0664A"/>
             </a:solidFill>
           </a:ln>
           <a:effectLst/>
@@ -5335,9 +5335,9 @@
             <a:r>
               <a:rPr sz="1200" b="1">
                 <a:solidFill>
-                  <a:srgbClr val="C07A1E"/>
-                </a:solidFill>
-                <a:latin typeface="Arial"/>
+                  <a:srgbClr val="2A8C82"/>
+                </a:solidFill>
+                <a:latin typeface="Calibri"/>
               </a:rPr>
               <a:t>IMAGE · R-IMG-01 · coming</a:t>
             </a:r>
@@ -5374,9 +5374,9 @@
             <a:r>
               <a:rPr sz="1800" b="1">
                 <a:solidFill>
-                  <a:srgbClr val="1F4D2B"/>
-                </a:solidFill>
-                <a:latin typeface="Georgia"/>
+                  <a:srgbClr val="2B2B2B"/>
+                </a:solidFill>
+                <a:latin typeface="Arial Rounded MT Bold"/>
               </a:rPr>
               <a:t>The three families</a:t>
             </a:r>
@@ -5413,9 +5413,9 @@
             <a:r>
               <a:rPr sz="1100" b="0">
                 <a:solidFill>
-                  <a:srgbClr val="20190F"/>
-                </a:solidFill>
-                <a:latin typeface="Arial"/>
+                  <a:srgbClr val="2B2B2B"/>
+                </a:solidFill>
+                <a:latin typeface="Calibri"/>
               </a:rPr>
               <a:t>Three side-by-side scenes, equal width, one per family, same style, a thin Hairline divider between them. **Left — the Dlamini household (rural KZN):** a rondavel and a small block house on a green hillside; a 2 500 ℓ plastic water tank beside the house; trench beds with leafy greens, cabbages and a row of maize. A grandmother (70s, headscarf, cardigan)…</a:t>
             </a:r>
@@ -5436,7 +5436,7 @@
     <p:bg>
       <p:bgPr>
         <a:solidFill>
-          <a:srgbClr val="F7F2E9"/>
+          <a:srgbClr val="FFF4E0"/>
         </a:solidFill>
         <a:effectLst/>
       </p:bgPr>
@@ -5478,9 +5478,9 @@
             <a:r>
               <a:rPr sz="1000" b="0">
                 <a:solidFill>
-                  <a:srgbClr val="6B6255"/>
-                </a:solidFill>
-                <a:latin typeface="Arial"/>
+                  <a:srgbClr val="2B2B2B"/>
+                </a:solidFill>
+                <a:latin typeface="Calibri"/>
               </a:rPr>
               <a:t>R-D1-10</a:t>
             </a:r>
@@ -5517,9 +5517,9 @@
             <a:r>
               <a:rPr sz="1000" b="0">
                 <a:solidFill>
-                  <a:srgbClr val="6B6255"/>
-                </a:solidFill>
-                <a:latin typeface="Arial"/>
+                  <a:srgbClr val="2B2B2B"/>
+                </a:solidFill>
+                <a:latin typeface="Calibri"/>
               </a:rPr>
               <a:t>Farmer Money</a:t>
             </a:r>
@@ -5541,7 +5541,7 @@
             <a:avLst/>
           </a:prstGeom>
           <a:solidFill>
-            <a:srgbClr val="C07A1E"/>
+            <a:srgbClr val="2A8C82"/>
           </a:solidFill>
           <a:ln>
             <a:noFill/>
@@ -5600,9 +5600,9 @@
             <a:r>
               <a:rPr sz="1400" b="1">
                 <a:solidFill>
-                  <a:srgbClr val="F7F2E9"/>
-                </a:solidFill>
-                <a:latin typeface="Arial"/>
+                  <a:srgbClr val="FFF4E0"/>
+                </a:solidFill>
+                <a:latin typeface="Calibri"/>
               </a:rPr>
               <a:t>YOUR TURN</a:t>
             </a:r>
@@ -5639,9 +5639,9 @@
             <a:r>
               <a:rPr sz="3800" b="1">
                 <a:solidFill>
-                  <a:srgbClr val="1F4D2B"/>
-                </a:solidFill>
-                <a:latin typeface="Georgia"/>
+                  <a:srgbClr val="2B2B2B"/>
+                </a:solidFill>
+                <a:latin typeface="Arial Rounded MT Bold"/>
               </a:rPr>
               <a:t>Sort the cards</a:t>
             </a:r>
@@ -5663,7 +5663,7 @@
             <a:avLst/>
           </a:prstGeom>
           <a:solidFill>
-            <a:srgbClr val="E2D8C4"/>
+            <a:srgbClr val="E0664A"/>
           </a:solidFill>
           <a:ln>
             <a:noFill/>
@@ -5722,9 +5722,9 @@
             <a:r>
               <a:rPr sz="3000" b="1">
                 <a:solidFill>
-                  <a:srgbClr val="20190F"/>
-                </a:solidFill>
-                <a:latin typeface="Arial"/>
+                  <a:srgbClr val="2B2B2B"/>
+                </a:solidFill>
+                <a:latin typeface="Calibri"/>
               </a:rPr>
               <a:t>•  24 cards, three piles</a:t>
             </a:r>
@@ -5738,9 +5738,9 @@
             <a:r>
               <a:rPr sz="3000" b="1">
                 <a:solidFill>
-                  <a:srgbClr val="20190F"/>
-                </a:solidFill>
-                <a:latin typeface="Arial"/>
+                  <a:srgbClr val="2B2B2B"/>
+                </a:solidFill>
+                <a:latin typeface="Calibri"/>
               </a:rPr>
               <a:t>•  Need · Want · It depends</a:t>
             </a:r>
@@ -5754,9 +5754,9 @@
             <a:r>
               <a:rPr sz="3000" b="1">
                 <a:solidFill>
-                  <a:srgbClr val="20190F"/>
-                </a:solidFill>
-                <a:latin typeface="Arial"/>
+                  <a:srgbClr val="2B2B2B"/>
+                </a:solidFill>
+                <a:latin typeface="Calibri"/>
               </a:rPr>
               <a:t>•  Then: the shock card</a:t>
             </a:r>
@@ -5778,11 +5778,11 @@
             <a:avLst/>
           </a:prstGeom>
           <a:solidFill>
-            <a:srgbClr val="FBF6EC"/>
+            <a:srgbClr val="FFF4E0"/>
           </a:solidFill>
           <a:ln w="15875">
             <a:solidFill>
-              <a:srgbClr val="E2D8C4"/>
+              <a:srgbClr val="E0664A"/>
             </a:solidFill>
           </a:ln>
           <a:effectLst/>
@@ -5839,9 +5839,9 @@
             <a:r>
               <a:rPr sz="1200" b="1">
                 <a:solidFill>
-                  <a:srgbClr val="C07A1E"/>
-                </a:solidFill>
-                <a:latin typeface="Arial"/>
+                  <a:srgbClr val="2A8C82"/>
+                </a:solidFill>
+                <a:latin typeface="Calibri"/>
               </a:rPr>
               <a:t>IMAGE · R-IMG-02 · coming</a:t>
             </a:r>
@@ -5878,9 +5878,9 @@
             <a:r>
               <a:rPr sz="1800" b="1">
                 <a:solidFill>
-                  <a:srgbClr val="1F4D2B"/>
-                </a:solidFill>
-                <a:latin typeface="Georgia"/>
+                  <a:srgbClr val="2B2B2B"/>
+                </a:solidFill>
+                <a:latin typeface="Arial Rounded MT Bold"/>
               </a:rPr>
               <a:t>Needs and wants picture cards (24)</a:t>
             </a:r>
@@ -5917,9 +5917,9 @@
             <a:r>
               <a:rPr sz="1100" b="0">
                 <a:solidFill>
-                  <a:srgbClr val="20190F"/>
-                </a:solidFill>
-                <a:latin typeface="Arial"/>
+                  <a:srgbClr val="2B2B2B"/>
+                </a:solidFill>
+                <a:latin typeface="Calibri"/>
               </a:rPr>
               <a:t>One A4 sheet of 24 equal cards (4 × 6 grid, 5 mm gutters, cut lines), each a single simple object on Paper, thick outline, no text: 1 bag of maize meal · 2 loaf of bread · 3 paraffin/gas bottle · 4 prepaid electricity token (a plain slip beside a light bulb) · 5 bar of soap · 6 school shoes · 7 school uniform jersey · 8 minibus taxi · 9 clinic card and…</a:t>
             </a:r>
@@ -5940,7 +5940,7 @@
     <p:bg>
       <p:bgPr>
         <a:solidFill>
-          <a:srgbClr val="F7F2E9"/>
+          <a:srgbClr val="FFF4E0"/>
         </a:solidFill>
         <a:effectLst/>
       </p:bgPr>
@@ -5982,9 +5982,9 @@
             <a:r>
               <a:rPr sz="1000" b="0">
                 <a:solidFill>
-                  <a:srgbClr val="6B6255"/>
-                </a:solidFill>
-                <a:latin typeface="Arial"/>
+                  <a:srgbClr val="2B2B2B"/>
+                </a:solidFill>
+                <a:latin typeface="Calibri"/>
               </a:rPr>
               <a:t>R-D1-11   ·   Poster R-P02</a:t>
             </a:r>
@@ -6021,9 +6021,9 @@
             <a:r>
               <a:rPr sz="1000" b="0">
                 <a:solidFill>
-                  <a:srgbClr val="6B6255"/>
-                </a:solidFill>
-                <a:latin typeface="Arial"/>
+                  <a:srgbClr val="2B2B2B"/>
+                </a:solidFill>
+                <a:latin typeface="Calibri"/>
               </a:rPr>
               <a:t>Farmer Money</a:t>
             </a:r>
@@ -6060,9 +6060,9 @@
             <a:r>
               <a:rPr sz="3800" b="1">
                 <a:solidFill>
-                  <a:srgbClr val="1F4D2B"/>
-                </a:solidFill>
-                <a:latin typeface="Georgia"/>
+                  <a:srgbClr val="2B2B2B"/>
+                </a:solidFill>
+                <a:latin typeface="Arial Rounded MT Bold"/>
               </a:rPr>
               <a:t>What did the maps show?</a:t>
             </a:r>
@@ -6084,7 +6084,7 @@
             <a:avLst/>
           </a:prstGeom>
           <a:solidFill>
-            <a:srgbClr val="E2D8C4"/>
+            <a:srgbClr val="E0664A"/>
           </a:solidFill>
           <a:ln>
             <a:noFill/>
@@ -6143,9 +6143,9 @@
             <a:r>
               <a:rPr sz="2800" b="0">
                 <a:solidFill>
-                  <a:srgbClr val="20190F"/>
-                </a:solidFill>
-                <a:latin typeface="Arial"/>
+                  <a:srgbClr val="2B2B2B"/>
+                </a:solidFill>
+                <a:latin typeface="Calibri"/>
               </a:rPr>
               <a:t>•  Food is the biggest arrow</a:t>
             </a:r>
@@ -6159,9 +6159,9 @@
             <a:r>
               <a:rPr sz="2800" b="0">
                 <a:solidFill>
-                  <a:srgbClr val="20190F"/>
-                </a:solidFill>
-                <a:latin typeface="Arial"/>
+                  <a:srgbClr val="2B2B2B"/>
+                </a:solidFill>
+                <a:latin typeface="Calibri"/>
               </a:rPr>
               <a:t>•  Grants carry most families</a:t>
             </a:r>
@@ -6175,9 +6175,9 @@
             <a:r>
               <a:rPr sz="2800" b="0">
                 <a:solidFill>
-                  <a:srgbClr val="20190F"/>
-                </a:solidFill>
-                <a:latin typeface="Arial"/>
+                  <a:srgbClr val="2B2B2B"/>
+                </a:solidFill>
+                <a:latin typeface="Calibri"/>
               </a:rPr>
               <a:t>•  See it before you fix it</a:t>
             </a:r>
@@ -6198,7 +6198,7 @@
     <p:bg>
       <p:bgPr>
         <a:solidFill>
-          <a:srgbClr val="1F4D2B"/>
+          <a:srgbClr val="4B2E4F"/>
         </a:solidFill>
         <a:effectLst/>
       </p:bgPr>
@@ -6240,9 +6240,9 @@
             <a:r>
               <a:rPr sz="1000" b="0">
                 <a:solidFill>
-                  <a:srgbClr val="A8D88A"/>
-                </a:solidFill>
-                <a:latin typeface="Arial"/>
+                  <a:srgbClr val="FFF4E0"/>
+                </a:solidFill>
+                <a:latin typeface="Calibri"/>
               </a:rPr>
               <a:t>R-D1-12   ·   Poster R-P04</a:t>
             </a:r>
@@ -6279,9 +6279,9 @@
             <a:r>
               <a:rPr sz="1000" b="0">
                 <a:solidFill>
-                  <a:srgbClr val="A8D88A"/>
-                </a:solidFill>
-                <a:latin typeface="Arial"/>
+                  <a:srgbClr val="FFF4E0"/>
+                </a:solidFill>
+                <a:latin typeface="Calibri"/>
               </a:rPr>
               <a:t>Farmer Money</a:t>
             </a:r>
@@ -6318,9 +6318,9 @@
             <a:r>
               <a:rPr sz="4800" b="1">
                 <a:solidFill>
-                  <a:srgbClr val="F7F2E9"/>
-                </a:solidFill>
-                <a:latin typeface="Georgia"/>
+                  <a:srgbClr val="FFF4E0"/>
+                </a:solidFill>
+                <a:latin typeface="Arial Rounded MT Bold"/>
               </a:rPr>
               <a:t>Plan the month first</a:t>
             </a:r>
@@ -6342,7 +6342,7 @@
             <a:avLst/>
           </a:prstGeom>
           <a:solidFill>
-            <a:srgbClr val="C07A1E"/>
+            <a:srgbClr val="2A8C82"/>
           </a:solidFill>
           <a:ln>
             <a:noFill/>
@@ -6401,9 +6401,9 @@
             <a:r>
               <a:rPr sz="2400" b="0">
                 <a:solidFill>
-                  <a:srgbClr val="A8D88A"/>
-                </a:solidFill>
-                <a:latin typeface="Arial"/>
+                  <a:srgbClr val="FFF4E0"/>
+                </a:solidFill>
+                <a:latin typeface="Calibri"/>
               </a:rPr>
               <a:t>A budget is a plan</a:t>
             </a:r>
@@ -6417,9 +6417,9 @@
             <a:r>
               <a:rPr sz="2400" b="0">
                 <a:solidFill>
-                  <a:srgbClr val="A8D88A"/>
-                </a:solidFill>
-                <a:latin typeface="Arial"/>
+                  <a:srgbClr val="FFF4E0"/>
+                </a:solidFill>
+                <a:latin typeface="Calibri"/>
               </a:rPr>
               <a:t>Made before the month starts</a:t>
             </a:r>
@@ -6441,11 +6441,11 @@
             <a:avLst/>
           </a:prstGeom>
           <a:solidFill>
-            <a:srgbClr val="FBF6EC"/>
+            <a:srgbClr val="FFF4E0"/>
           </a:solidFill>
           <a:ln w="15875">
             <a:solidFill>
-              <a:srgbClr val="E2D8C4"/>
+              <a:srgbClr val="E0664A"/>
             </a:solidFill>
           </a:ln>
           <a:effectLst/>
@@ -6502,9 +6502,9 @@
             <a:r>
               <a:rPr sz="1200" b="1">
                 <a:solidFill>
-                  <a:srgbClr val="C07A1E"/>
-                </a:solidFill>
-                <a:latin typeface="Arial"/>
+                  <a:srgbClr val="2A8C82"/>
+                </a:solidFill>
+                <a:latin typeface="Calibri"/>
               </a:rPr>
               <a:t>POSTER ART · R-P04-ART · coming</a:t>
             </a:r>
@@ -6541,9 +6541,9 @@
             <a:r>
               <a:rPr sz="1800" b="1">
                 <a:solidFill>
-                  <a:srgbClr val="1F4D2B"/>
-                </a:solidFill>
-                <a:latin typeface="Georgia"/>
+                  <a:srgbClr val="2B2B2B"/>
+                </a:solidFill>
+                <a:latin typeface="Arial Rounded MT Bold"/>
               </a:rPr>
               <a:t>Artwork for R-P04 · Plan the month before it starts</a:t>
             </a:r>
@@ -6580,9 +6580,9 @@
             <a:r>
               <a:rPr sz="1100" b="0">
                 <a:solidFill>
-                  <a:srgbClr val="20190F"/>
-                </a:solidFill>
-                <a:latin typeface="Arial"/>
+                  <a:srgbClr val="2B2B2B"/>
+                </a:solidFill>
+                <a:latin typeface="Calibri"/>
               </a:rPr>
               <a:t>A kitchen table seen from slightly above. A woman (40s, headscarf) places generic banknotes onto a large sheet divided into six rows, each row marked only by an icon: ① a hand receiving coins ② a food basket ③ a lidded tin with a lock ④ a seedling in a tin ⑤ a cap and sweets ⑥ an umbrella (surprises). The notes on rows ②–④ are in bigger piles than on ⑤.…</a:t>
             </a:r>
@@ -6603,7 +6603,7 @@
     <p:bg>
       <p:bgPr>
         <a:solidFill>
-          <a:srgbClr val="F7F2E9"/>
+          <a:srgbClr val="FFF4E0"/>
         </a:solidFill>
         <a:effectLst/>
       </p:bgPr>
@@ -6645,9 +6645,9 @@
             <a:r>
               <a:rPr sz="1000" b="0">
                 <a:solidFill>
-                  <a:srgbClr val="6B6255"/>
-                </a:solidFill>
-                <a:latin typeface="Arial"/>
+                  <a:srgbClr val="2B2B2B"/>
+                </a:solidFill>
+                <a:latin typeface="Calibri"/>
               </a:rPr>
               <a:t>R-D1-13   ·   Poster R-P04</a:t>
             </a:r>
@@ -6684,9 +6684,9 @@
             <a:r>
               <a:rPr sz="1000" b="0">
                 <a:solidFill>
-                  <a:srgbClr val="6B6255"/>
-                </a:solidFill>
-                <a:latin typeface="Arial"/>
+                  <a:srgbClr val="2B2B2B"/>
+                </a:solidFill>
+                <a:latin typeface="Calibri"/>
               </a:rPr>
               <a:t>Farmer Money</a:t>
             </a:r>
@@ -6723,9 +6723,9 @@
             <a:r>
               <a:rPr sz="3800" b="1">
                 <a:solidFill>
-                  <a:srgbClr val="1F4D2B"/>
-                </a:solidFill>
-                <a:latin typeface="Georgia"/>
+                  <a:srgbClr val="2B2B2B"/>
+                </a:solidFill>
+                <a:latin typeface="Arial Rounded MT Bold"/>
               </a:rPr>
               <a:t>Six rows, in order</a:t>
             </a:r>
@@ -6747,7 +6747,7 @@
             <a:avLst/>
           </a:prstGeom>
           <a:solidFill>
-            <a:srgbClr val="E2D8C4"/>
+            <a:srgbClr val="E0664A"/>
           </a:solidFill>
           <a:ln>
             <a:noFill/>
@@ -6806,9 +6806,9 @@
             <a:r>
               <a:rPr sz="2800" b="0">
                 <a:solidFill>
-                  <a:srgbClr val="20190F"/>
-                </a:solidFill>
-                <a:latin typeface="Arial"/>
+                  <a:srgbClr val="2B2B2B"/>
+                </a:solidFill>
+                <a:latin typeface="Calibri"/>
               </a:rPr>
               <a:t>•  In · needs · save · farm</a:t>
             </a:r>
@@ -6822,9 +6822,9 @@
             <a:r>
               <a:rPr sz="2800" b="0">
                 <a:solidFill>
-                  <a:srgbClr val="20190F"/>
-                </a:solidFill>
-                <a:latin typeface="Arial"/>
+                  <a:srgbClr val="2B2B2B"/>
+                </a:solidFill>
+                <a:latin typeface="Calibri"/>
               </a:rPr>
               <a:t>•  Then wants</a:t>
             </a:r>
@@ -6838,9 +6838,9 @@
             <a:r>
               <a:rPr sz="2800" b="0">
                 <a:solidFill>
-                  <a:srgbClr val="20190F"/>
-                </a:solidFill>
-                <a:latin typeface="Arial"/>
+                  <a:srgbClr val="2B2B2B"/>
+                </a:solidFill>
+                <a:latin typeface="Calibri"/>
               </a:rPr>
               <a:t>•  Keep for surprises</a:t>
             </a:r>
@@ -6862,11 +6862,11 @@
             <a:avLst/>
           </a:prstGeom>
           <a:solidFill>
-            <a:srgbClr val="FBF6EC"/>
+            <a:srgbClr val="FFF4E0"/>
           </a:solidFill>
           <a:ln w="15875">
             <a:solidFill>
-              <a:srgbClr val="E2D8C4"/>
+              <a:srgbClr val="E0664A"/>
             </a:solidFill>
           </a:ln>
           <a:effectLst/>
@@ -6923,9 +6923,9 @@
             <a:r>
               <a:rPr sz="1200" b="1">
                 <a:solidFill>
-                  <a:srgbClr val="C07A1E"/>
-                </a:solidFill>
-                <a:latin typeface="Arial"/>
+                  <a:srgbClr val="2A8C82"/>
+                </a:solidFill>
+                <a:latin typeface="Calibri"/>
               </a:rPr>
               <a:t>POSTER ART · R-P04-ART · coming</a:t>
             </a:r>
@@ -6962,9 +6962,9 @@
             <a:r>
               <a:rPr sz="1800" b="1">
                 <a:solidFill>
-                  <a:srgbClr val="1F4D2B"/>
-                </a:solidFill>
-                <a:latin typeface="Georgia"/>
+                  <a:srgbClr val="2B2B2B"/>
+                </a:solidFill>
+                <a:latin typeface="Arial Rounded MT Bold"/>
               </a:rPr>
               <a:t>Artwork for R-P04 · Plan the month before it starts</a:t>
             </a:r>
@@ -7001,9 +7001,9 @@
             <a:r>
               <a:rPr sz="1100" b="0">
                 <a:solidFill>
-                  <a:srgbClr val="20190F"/>
-                </a:solidFill>
-                <a:latin typeface="Arial"/>
+                  <a:srgbClr val="2B2B2B"/>
+                </a:solidFill>
+                <a:latin typeface="Calibri"/>
               </a:rPr>
               <a:t>A kitchen table seen from slightly above. A woman (40s, headscarf) places generic banknotes onto a large sheet divided into six rows, each row marked only by an icon: ① a hand receiving coins ② a food basket ③ a lidded tin with a lock ④ a seedling in a tin ⑤ a cap and sweets ⑥ an umbrella (surprises). The notes on rows ②–④ are in bigger piles than on ⑤.…</a:t>
             </a:r>
@@ -7024,7 +7024,7 @@
     <p:bg>
       <p:bgPr>
         <a:solidFill>
-          <a:srgbClr val="F7F2E9"/>
+          <a:srgbClr val="FFF4E0"/>
         </a:solidFill>
         <a:effectLst/>
       </p:bgPr>
@@ -7066,9 +7066,9 @@
             <a:r>
               <a:rPr sz="1000" b="0">
                 <a:solidFill>
-                  <a:srgbClr val="6B6255"/>
-                </a:solidFill>
-                <a:latin typeface="Arial"/>
+                  <a:srgbClr val="2B2B2B"/>
+                </a:solidFill>
+                <a:latin typeface="Calibri"/>
               </a:rPr>
               <a:t>R-D1-14</a:t>
             </a:r>
@@ -7105,9 +7105,9 @@
             <a:r>
               <a:rPr sz="1000" b="0">
                 <a:solidFill>
-                  <a:srgbClr val="6B6255"/>
-                </a:solidFill>
-                <a:latin typeface="Arial"/>
+                  <a:srgbClr val="2B2B2B"/>
+                </a:solidFill>
+                <a:latin typeface="Calibri"/>
               </a:rPr>
               <a:t>Farmer Money</a:t>
             </a:r>
@@ -7129,7 +7129,7 @@
             <a:avLst/>
           </a:prstGeom>
           <a:solidFill>
-            <a:srgbClr val="C07A1E"/>
+            <a:srgbClr val="2A8C82"/>
           </a:solidFill>
           <a:ln>
             <a:noFill/>
@@ -7188,9 +7188,9 @@
             <a:r>
               <a:rPr sz="1400" b="1">
                 <a:solidFill>
-                  <a:srgbClr val="F7F2E9"/>
-                </a:solidFill>
-                <a:latin typeface="Arial"/>
+                  <a:srgbClr val="FFF4E0"/>
+                </a:solidFill>
+                <a:latin typeface="Calibri"/>
               </a:rPr>
               <a:t>YOUR TURN</a:t>
             </a:r>
@@ -7227,9 +7227,9 @@
             <a:r>
               <a:rPr sz="3800" b="1">
                 <a:solidFill>
-                  <a:srgbClr val="1F4D2B"/>
-                </a:solidFill>
-                <a:latin typeface="Georgia"/>
+                  <a:srgbClr val="2B2B2B"/>
+                </a:solidFill>
+                <a:latin typeface="Arial Rounded MT Bold"/>
               </a:rPr>
               <a:t>Budget with play money</a:t>
             </a:r>
@@ -7251,7 +7251,7 @@
             <a:avLst/>
           </a:prstGeom>
           <a:solidFill>
-            <a:srgbClr val="E2D8C4"/>
+            <a:srgbClr val="E0664A"/>
           </a:solidFill>
           <a:ln>
             <a:noFill/>
@@ -7310,9 +7310,9 @@
             <a:r>
               <a:rPr sz="2600" b="1">
                 <a:solidFill>
-                  <a:srgbClr val="20190F"/>
-                </a:solidFill>
-                <a:latin typeface="Arial"/>
+                  <a:srgbClr val="2B2B2B"/>
+                </a:solidFill>
+                <a:latin typeface="Calibri"/>
               </a:rPr>
               <a:t>•  Collect your family's month</a:t>
             </a:r>
@@ -7326,9 +7326,9 @@
             <a:r>
               <a:rPr sz="2600" b="1">
                 <a:solidFill>
-                  <a:srgbClr val="20190F"/>
-                </a:solidFill>
-                <a:latin typeface="Arial"/>
+                  <a:srgbClr val="2B2B2B"/>
+                </a:solidFill>
+                <a:latin typeface="Calibri"/>
               </a:rPr>
               <a:t>•  Notes on each row, in order</a:t>
             </a:r>
@@ -7342,9 +7342,9 @@
             <a:r>
               <a:rPr sz="2600" b="1">
                 <a:solidFill>
-                  <a:srgbClr val="20190F"/>
-                </a:solidFill>
-                <a:latin typeface="Arial"/>
+                  <a:srgbClr val="2B2B2B"/>
+                </a:solidFill>
+                <a:latin typeface="Calibri"/>
               </a:rPr>
               <a:t>•  Keep R100 for surprises (20 min)</a:t>
             </a:r>
@@ -7366,11 +7366,11 @@
             <a:avLst/>
           </a:prstGeom>
           <a:solidFill>
-            <a:srgbClr val="FBF6EC"/>
+            <a:srgbClr val="FFF4E0"/>
           </a:solidFill>
           <a:ln w="15875">
             <a:solidFill>
-              <a:srgbClr val="E2D8C4"/>
+              <a:srgbClr val="E0664A"/>
             </a:solidFill>
           </a:ln>
           <a:effectLst/>
@@ -7427,9 +7427,9 @@
             <a:r>
               <a:rPr sz="1200" b="1">
                 <a:solidFill>
-                  <a:srgbClr val="C07A1E"/>
-                </a:solidFill>
-                <a:latin typeface="Arial"/>
+                  <a:srgbClr val="2A8C82"/>
+                </a:solidFill>
+                <a:latin typeface="Calibri"/>
               </a:rPr>
               <a:t>IMAGE · R-IMG-03 · coming</a:t>
             </a:r>
@@ -7466,9 +7466,9 @@
             <a:r>
               <a:rPr sz="1800" b="1">
                 <a:solidFill>
-                  <a:srgbClr val="1F4D2B"/>
-                </a:solidFill>
-                <a:latin typeface="Georgia"/>
+                  <a:srgbClr val="2B2B2B"/>
+                </a:solidFill>
+                <a:latin typeface="Arial Rounded MT Bold"/>
               </a:rPr>
               <a:t>Play money artwork</a:t>
             </a:r>
@@ -7505,9 +7505,9 @@
             <a:r>
               <a:rPr sz="1100" b="0">
                 <a:solidFill>
-                  <a:srgbClr val="20190F"/>
-                </a:solidFill>
-                <a:latin typeface="Arial"/>
+                  <a:srgbClr val="2B2B2B"/>
+                </a:solidFill>
+                <a:latin typeface="Calibri"/>
               </a:rPr>
               <a:t>Artwork for printed **play money** notes and coins. Notes 120 × 60 mm (clearly smaller than real notes, which must not be copied), coins 30 mm circles. Each note: Paper background, a big plain oval on the left with a simple **crop** drawing (R10 = a bean pod, R20 = a spinach leaf, R50 = a cabbage, R100 = a maize cob), a thick colour band down the right…</a:t>
             </a:r>
@@ -7528,7 +7528,7 @@
     <p:bg>
       <p:bgPr>
         <a:solidFill>
-          <a:srgbClr val="F7F2E9"/>
+          <a:srgbClr val="FFF4E0"/>
         </a:solidFill>
         <a:effectLst/>
       </p:bgPr>
@@ -7570,9 +7570,9 @@
             <a:r>
               <a:rPr sz="1000" b="0">
                 <a:solidFill>
-                  <a:srgbClr val="6B6255"/>
-                </a:solidFill>
-                <a:latin typeface="Arial"/>
+                  <a:srgbClr val="2B2B2B"/>
+                </a:solidFill>
+                <a:latin typeface="Calibri"/>
               </a:rPr>
               <a:t>R-D1-15   ·   Poster R-P05</a:t>
             </a:r>
@@ -7609,9 +7609,9 @@
             <a:r>
               <a:rPr sz="1000" b="0">
                 <a:solidFill>
-                  <a:srgbClr val="6B6255"/>
-                </a:solidFill>
-                <a:latin typeface="Arial"/>
+                  <a:srgbClr val="2B2B2B"/>
+                </a:solidFill>
+                <a:latin typeface="Calibri"/>
               </a:rPr>
               <a:t>Farmer Money</a:t>
             </a:r>
@@ -7648,9 +7648,9 @@
             <a:r>
               <a:rPr sz="3800" b="1">
                 <a:solidFill>
-                  <a:srgbClr val="1F4D2B"/>
-                </a:solidFill>
-                <a:latin typeface="Georgia"/>
+                  <a:srgbClr val="2B2B2B"/>
+                </a:solidFill>
+                <a:latin typeface="Arial Rounded MT Bold"/>
               </a:rPr>
               <a:t>Three tins</a:t>
             </a:r>
@@ -7672,7 +7672,7 @@
             <a:avLst/>
           </a:prstGeom>
           <a:solidFill>
-            <a:srgbClr val="E2D8C4"/>
+            <a:srgbClr val="E0664A"/>
           </a:solidFill>
           <a:ln>
             <a:noFill/>
@@ -7731,9 +7731,9 @@
             <a:r>
               <a:rPr sz="2400" b="0">
                 <a:solidFill>
-                  <a:srgbClr val="20190F"/>
-                </a:solidFill>
-                <a:latin typeface="Arial"/>
+                  <a:srgbClr val="2B2B2B"/>
+                </a:solidFill>
+                <a:latin typeface="Calibri"/>
               </a:rPr>
               <a:t>•  Home · Save · Farm</a:t>
             </a:r>
@@ -7747,9 +7747,9 @@
             <a:r>
               <a:rPr sz="2400" b="0">
                 <a:solidFill>
-                  <a:srgbClr val="20190F"/>
-                </a:solidFill>
-                <a:latin typeface="Arial"/>
+                  <a:srgbClr val="2B2B2B"/>
+                </a:solidFill>
+                <a:latin typeface="Calibri"/>
               </a:rPr>
               <a:t>•  Garden money into FARM first</a:t>
             </a:r>
@@ -7763,9 +7763,9 @@
             <a:r>
               <a:rPr sz="2400" b="0">
                 <a:solidFill>
-                  <a:srgbClr val="20190F"/>
-                </a:solidFill>
-                <a:latin typeface="Arial"/>
+                  <a:srgbClr val="2B2B2B"/>
+                </a:solidFill>
+                <a:latin typeface="Calibri"/>
               </a:rPr>
               <a:t>•  The farm pays home — on purpose</a:t>
             </a:r>
@@ -7787,11 +7787,11 @@
             <a:avLst/>
           </a:prstGeom>
           <a:solidFill>
-            <a:srgbClr val="FBF6EC"/>
+            <a:srgbClr val="FFF4E0"/>
           </a:solidFill>
           <a:ln w="15875">
             <a:solidFill>
-              <a:srgbClr val="E2D8C4"/>
+              <a:srgbClr val="E0664A"/>
             </a:solidFill>
           </a:ln>
           <a:effectLst/>
@@ -7848,9 +7848,9 @@
             <a:r>
               <a:rPr sz="1200" b="1">
                 <a:solidFill>
-                  <a:srgbClr val="C07A1E"/>
-                </a:solidFill>
-                <a:latin typeface="Arial"/>
+                  <a:srgbClr val="2A8C82"/>
+                </a:solidFill>
+                <a:latin typeface="Calibri"/>
               </a:rPr>
               <a:t>ANIMATION · R-ANI-02 · coming</a:t>
             </a:r>
@@ -7887,9 +7887,9 @@
             <a:r>
               <a:rPr sz="1800" b="1">
                 <a:solidFill>
-                  <a:srgbClr val="1F4D2B"/>
-                </a:solidFill>
-                <a:latin typeface="Georgia"/>
+                  <a:srgbClr val="2B2B2B"/>
+                </a:solidFill>
+                <a:latin typeface="Arial Rounded MT Bold"/>
               </a:rPr>
               <a:t>Three tins</a:t>
             </a:r>
@@ -7926,9 +7926,9 @@
             <a:r>
               <a:rPr sz="1100" b="0">
                 <a:solidFill>
-                  <a:srgbClr val="20190F"/>
-                </a:solidFill>
-                <a:latin typeface="Arial"/>
+                  <a:srgbClr val="2B2B2B"/>
+                </a:solidFill>
+                <a:latin typeface="Calibri"/>
               </a:rPr>
               <a:t>A hand hands over a bunch of greens; a buyer's hand gives coins (0–3 s). The coins drop into a tin marked with a seedling icon (FARM) (3–6 s). A family of three appears around a table; a hand lifts some coins from the FARM tin into a tin with a house icon (HOME) and a tin with a padlock icon (SAVE); some coins stay in FARM (6–12 s). The three tins sit…</a:t>
             </a:r>
@@ -7949,7 +7949,7 @@
     <p:bg>
       <p:bgPr>
         <a:solidFill>
-          <a:srgbClr val="F7F2E9"/>
+          <a:srgbClr val="FFF4E0"/>
         </a:solidFill>
         <a:effectLst/>
       </p:bgPr>
@@ -7991,9 +7991,9 @@
             <a:r>
               <a:rPr sz="1000" b="0">
                 <a:solidFill>
-                  <a:srgbClr val="6B6255"/>
-                </a:solidFill>
-                <a:latin typeface="Arial"/>
+                  <a:srgbClr val="2B2B2B"/>
+                </a:solidFill>
+                <a:latin typeface="Calibri"/>
               </a:rPr>
               <a:t>R-D1-16   ·   Poster R-P05</a:t>
             </a:r>
@@ -8030,9 +8030,9 @@
             <a:r>
               <a:rPr sz="1000" b="0">
                 <a:solidFill>
-                  <a:srgbClr val="6B6255"/>
-                </a:solidFill>
-                <a:latin typeface="Arial"/>
+                  <a:srgbClr val="2B2B2B"/>
+                </a:solidFill>
+                <a:latin typeface="Calibri"/>
               </a:rPr>
               <a:t>Farmer Money</a:t>
             </a:r>
@@ -8054,7 +8054,7 @@
             <a:avLst/>
           </a:prstGeom>
           <a:solidFill>
-            <a:srgbClr val="C07A1E"/>
+            <a:srgbClr val="2A8C82"/>
           </a:solidFill>
           <a:ln>
             <a:noFill/>
@@ -8113,9 +8113,9 @@
             <a:r>
               <a:rPr sz="1400" b="1">
                 <a:solidFill>
-                  <a:srgbClr val="F7F2E9"/>
-                </a:solidFill>
-                <a:latin typeface="Arial"/>
+                  <a:srgbClr val="FFF4E0"/>
+                </a:solidFill>
+                <a:latin typeface="Calibri"/>
               </a:rPr>
               <a:t>YOUR TURN</a:t>
             </a:r>
@@ -8152,9 +8152,9 @@
             <a:r>
               <a:rPr sz="3800" b="1">
                 <a:solidFill>
-                  <a:srgbClr val="1F4D2B"/>
-                </a:solidFill>
-                <a:latin typeface="Georgia"/>
+                  <a:srgbClr val="2B2B2B"/>
+                </a:solidFill>
+                <a:latin typeface="Arial Rounded MT Bold"/>
               </a:rPr>
               <a:t>Who decides?</a:t>
             </a:r>
@@ -8176,7 +8176,7 @@
             <a:avLst/>
           </a:prstGeom>
           <a:solidFill>
-            <a:srgbClr val="E2D8C4"/>
+            <a:srgbClr val="E0664A"/>
           </a:solidFill>
           <a:ln>
             <a:noFill/>
@@ -8235,9 +8235,9 @@
             <a:r>
               <a:rPr sz="3000" b="1">
                 <a:solidFill>
-                  <a:srgbClr val="20190F"/>
-                </a:solidFill>
-                <a:latin typeface="Arial"/>
+                  <a:srgbClr val="2B2B2B"/>
+                </a:solidFill>
+                <a:latin typeface="Calibri"/>
               </a:rPr>
               <a:t>•  The Dlamini family's Sunday</a:t>
             </a:r>
@@ -8251,9 +8251,9 @@
             <a:r>
               <a:rPr sz="3000" b="1">
                 <a:solidFill>
-                  <a:srgbClr val="20190F"/>
-                </a:solidFill>
-                <a:latin typeface="Arial"/>
+                  <a:srgbClr val="2B2B2B"/>
+                </a:solidFill>
+                <a:latin typeface="Calibri"/>
               </a:rPr>
               <a:t>•  Who works? Who decides?</a:t>
             </a:r>
@@ -8267,9 +8267,9 @@
             <a:r>
               <a:rPr sz="3000" b="1">
                 <a:solidFill>
-                  <a:srgbClr val="20190F"/>
-                </a:solidFill>
-                <a:latin typeface="Arial"/>
+                  <a:srgbClr val="2B2B2B"/>
+                </a:solidFill>
+                <a:latin typeface="Calibri"/>
               </a:rPr>
               <a:t>•  How could they agree? (12 min)</a:t>
             </a:r>
@@ -8291,11 +8291,11 @@
             <a:avLst/>
           </a:prstGeom>
           <a:solidFill>
-            <a:srgbClr val="FBF6EC"/>
+            <a:srgbClr val="FFF4E0"/>
           </a:solidFill>
           <a:ln w="15875">
             <a:solidFill>
-              <a:srgbClr val="E2D8C4"/>
+              <a:srgbClr val="E0664A"/>
             </a:solidFill>
           </a:ln>
           <a:effectLst/>
@@ -8352,9 +8352,9 @@
             <a:r>
               <a:rPr sz="1200" b="1">
                 <a:solidFill>
-                  <a:srgbClr val="C07A1E"/>
-                </a:solidFill>
-                <a:latin typeface="Arial"/>
+                  <a:srgbClr val="2A8C82"/>
+                </a:solidFill>
+                <a:latin typeface="Calibri"/>
               </a:rPr>
               <a:t>IMAGE · R-IMG-01 · coming</a:t>
             </a:r>
@@ -8391,9 +8391,9 @@
             <a:r>
               <a:rPr sz="1800" b="1">
                 <a:solidFill>
-                  <a:srgbClr val="1F4D2B"/>
-                </a:solidFill>
-                <a:latin typeface="Georgia"/>
+                  <a:srgbClr val="2B2B2B"/>
+                </a:solidFill>
+                <a:latin typeface="Arial Rounded MT Bold"/>
               </a:rPr>
               <a:t>The three families</a:t>
             </a:r>
@@ -8430,9 +8430,9 @@
             <a:r>
               <a:rPr sz="1100" b="0">
                 <a:solidFill>
-                  <a:srgbClr val="20190F"/>
-                </a:solidFill>
-                <a:latin typeface="Arial"/>
+                  <a:srgbClr val="2B2B2B"/>
+                </a:solidFill>
+                <a:latin typeface="Calibri"/>
               </a:rPr>
               <a:t>Three side-by-side scenes, equal width, one per family, same style, a thin Hairline divider between them. **Left — the Dlamini household (rural KZN):** a rondavel and a small block house on a green hillside; a 2 500 ℓ plastic water tank beside the house; trench beds with leafy greens, cabbages and a row of maize. A grandmother (70s, headscarf, cardigan)…</a:t>
             </a:r>
@@ -8453,7 +8453,7 @@
     <p:bg>
       <p:bgPr>
         <a:solidFill>
-          <a:srgbClr val="F7F2E9"/>
+          <a:srgbClr val="FFF4E0"/>
         </a:solidFill>
         <a:effectLst/>
       </p:bgPr>
@@ -8495,9 +8495,9 @@
             <a:r>
               <a:rPr sz="1000" b="0">
                 <a:solidFill>
-                  <a:srgbClr val="6B6255"/>
-                </a:solidFill>
-                <a:latin typeface="Arial"/>
+                  <a:srgbClr val="2B2B2B"/>
+                </a:solidFill>
+                <a:latin typeface="Calibri"/>
               </a:rPr>
               <a:t>R-D1-17   ·   Poster R-P06</a:t>
             </a:r>
@@ -8534,9 +8534,9 @@
             <a:r>
               <a:rPr sz="1000" b="0">
                 <a:solidFill>
-                  <a:srgbClr val="6B6255"/>
-                </a:solidFill>
-                <a:latin typeface="Arial"/>
+                  <a:srgbClr val="2B2B2B"/>
+                </a:solidFill>
+                <a:latin typeface="Calibri"/>
               </a:rPr>
               <a:t>Farmer Money</a:t>
             </a:r>
@@ -8573,9 +8573,9 @@
             <a:r>
               <a:rPr sz="3800" b="1">
                 <a:solidFill>
-                  <a:srgbClr val="1F4D2B"/>
-                </a:solidFill>
-                <a:latin typeface="Georgia"/>
+                  <a:srgbClr val="2B2B2B"/>
+                </a:solidFill>
+                <a:latin typeface="Arial Rounded MT Bold"/>
               </a:rPr>
               <a:t>Ways to save</a:t>
             </a:r>
@@ -8597,7 +8597,7 @@
             <a:avLst/>
           </a:prstGeom>
           <a:solidFill>
-            <a:srgbClr val="E2D8C4"/>
+            <a:srgbClr val="E0664A"/>
           </a:solidFill>
           <a:ln>
             <a:noFill/>
@@ -8656,9 +8656,9 @@
             <a:r>
               <a:rPr sz="2800" b="0">
                 <a:solidFill>
-                  <a:srgbClr val="20190F"/>
-                </a:solidFill>
-                <a:latin typeface="Arial"/>
+                  <a:srgbClr val="2B2B2B"/>
+                </a:solidFill>
+                <a:latin typeface="Calibri"/>
               </a:rPr>
               <a:t>•  Savings group · bank account</a:t>
             </a:r>
@@ -8672,9 +8672,9 @@
             <a:r>
               <a:rPr sz="2800" b="0">
                 <a:solidFill>
-                  <a:srgbClr val="20190F"/>
-                </a:solidFill>
-                <a:latin typeface="Arial"/>
+                  <a:srgbClr val="2B2B2B"/>
+                </a:solidFill>
+                <a:latin typeface="Calibri"/>
               </a:rPr>
               <a:t>•  Money on phone · tin at home</a:t>
             </a:r>
@@ -8688,9 +8688,9 @@
             <a:r>
               <a:rPr sz="2800" b="0">
                 <a:solidFill>
-                  <a:srgbClr val="20190F"/>
-                </a:solidFill>
-                <a:latin typeface="Arial"/>
+                  <a:srgbClr val="2B2B2B"/>
+                </a:solidFill>
+                <a:latin typeface="Calibri"/>
               </a:rPr>
               <a:t>•  Which two will you use?</a:t>
             </a:r>
@@ -8712,11 +8712,11 @@
             <a:avLst/>
           </a:prstGeom>
           <a:solidFill>
-            <a:srgbClr val="FBF6EC"/>
+            <a:srgbClr val="FFF4E0"/>
           </a:solidFill>
           <a:ln w="15875">
             <a:solidFill>
-              <a:srgbClr val="E2D8C4"/>
+              <a:srgbClr val="E0664A"/>
             </a:solidFill>
           </a:ln>
           <a:effectLst/>
@@ -8773,9 +8773,9 @@
             <a:r>
               <a:rPr sz="1200" b="1">
                 <a:solidFill>
-                  <a:srgbClr val="C07A1E"/>
-                </a:solidFill>
-                <a:latin typeface="Arial"/>
+                  <a:srgbClr val="2A8C82"/>
+                </a:solidFill>
+                <a:latin typeface="Calibri"/>
               </a:rPr>
               <a:t>POSTER ART · R-P06-ART · coming</a:t>
             </a:r>
@@ -8812,9 +8812,9 @@
             <a:r>
               <a:rPr sz="1800" b="1">
                 <a:solidFill>
-                  <a:srgbClr val="1F4D2B"/>
-                </a:solidFill>
-                <a:latin typeface="Georgia"/>
+                  <a:srgbClr val="2B2B2B"/>
+                </a:solidFill>
+                <a:latin typeface="Arial Rounded MT Bold"/>
               </a:rPr>
               <a:t>Artwork for R-P06 · Ways to save</a:t>
             </a:r>
@@ -8851,9 +8851,9 @@
             <a:r>
               <a:rPr sz="1100" b="0">
                 <a:solidFill>
-                  <a:srgbClr val="20190F"/>
-                </a:solidFill>
-                <a:latin typeface="Arial"/>
+                  <a:srgbClr val="2B2B2B"/>
+                </a:solidFill>
+                <a:latin typeface="Calibri"/>
               </a:rPr>
               <a:t>Four equal panels in a 2 × 2 grid. ① A savings group: eight people (mostly women, one man, one youth) on chairs in a circle; on a small table a metal cash box with **three padlocks**; three people each hold a key; one writes in a book. ② A small plain bank building (no signage) with a woman at a counter handing over a card. ③ A hand holding a plain…</a:t>
             </a:r>
@@ -8874,7 +8874,7 @@
     <p:bg>
       <p:bgPr>
         <a:solidFill>
-          <a:srgbClr val="F7F2E9"/>
+          <a:srgbClr val="FFF4E0"/>
         </a:solidFill>
         <a:effectLst/>
       </p:bgPr>
@@ -8916,9 +8916,9 @@
             <a:r>
               <a:rPr sz="1000" b="0">
                 <a:solidFill>
-                  <a:srgbClr val="6B6255"/>
-                </a:solidFill>
-                <a:latin typeface="Arial"/>
+                  <a:srgbClr val="2B2B2B"/>
+                </a:solidFill>
+                <a:latin typeface="Calibri"/>
               </a:rPr>
               <a:t>R-D1-18</a:t>
             </a:r>
@@ -8955,9 +8955,9 @@
             <a:r>
               <a:rPr sz="1000" b="0">
                 <a:solidFill>
-                  <a:srgbClr val="6B6255"/>
-                </a:solidFill>
-                <a:latin typeface="Arial"/>
+                  <a:srgbClr val="2B2B2B"/>
+                </a:solidFill>
+                <a:latin typeface="Calibri"/>
               </a:rPr>
               <a:t>Farmer Money</a:t>
             </a:r>
@@ -8979,7 +8979,7 @@
             <a:avLst/>
           </a:prstGeom>
           <a:solidFill>
-            <a:srgbClr val="C07A1E"/>
+            <a:srgbClr val="2A8C82"/>
           </a:solidFill>
           <a:ln>
             <a:noFill/>
@@ -9038,9 +9038,9 @@
             <a:r>
               <a:rPr sz="1400" b="1">
                 <a:solidFill>
-                  <a:srgbClr val="F7F2E9"/>
-                </a:solidFill>
-                <a:latin typeface="Arial"/>
+                  <a:srgbClr val="FFF4E0"/>
+                </a:solidFill>
+                <a:latin typeface="Calibri"/>
               </a:rPr>
               <a:t>YOUR TURN</a:t>
             </a:r>
@@ -9077,9 +9077,9 @@
             <a:r>
               <a:rPr sz="3800" b="1">
                 <a:solidFill>
-                  <a:srgbClr val="1F4D2B"/>
-                </a:solidFill>
-                <a:latin typeface="Georgia"/>
+                  <a:srgbClr val="2B2B2B"/>
+                </a:solidFill>
+                <a:latin typeface="Arial Rounded MT Bold"/>
               </a:rPr>
               <a:t>Score the four ways</a:t>
             </a:r>
@@ -9101,7 +9101,7 @@
             <a:avLst/>
           </a:prstGeom>
           <a:solidFill>
-            <a:srgbClr val="E2D8C4"/>
+            <a:srgbClr val="E0664A"/>
           </a:solidFill>
           <a:ln>
             <a:noFill/>
@@ -9160,9 +9160,9 @@
             <a:r>
               <a:rPr sz="3000" b="1">
                 <a:solidFill>
-                  <a:srgbClr val="20190F"/>
-                </a:solidFill>
-                <a:latin typeface="Arial"/>
+                  <a:srgbClr val="2B2B2B"/>
+                </a:solidFill>
+                <a:latin typeface="Calibri"/>
               </a:rPr>
               <a:t>•  Safe? Quick? Free?</a:t>
             </a:r>
@@ -9176,9 +9176,9 @@
             <a:r>
               <a:rPr sz="3000" b="1">
                 <a:solidFill>
-                  <a:srgbClr val="20190F"/>
-                </a:solidFill>
-                <a:latin typeface="Arial"/>
+                  <a:srgbClr val="2B2B2B"/>
+                </a:solidFill>
+                <a:latin typeface="Calibri"/>
               </a:rPr>
               <a:t>•  Helps me keep saving?</a:t>
             </a:r>
@@ -9192,9 +9192,9 @@
             <a:r>
               <a:rPr sz="3000" b="1">
                 <a:solidFill>
-                  <a:srgbClr val="20190F"/>
-                </a:solidFill>
-                <a:latin typeface="Arial"/>
+                  <a:srgbClr val="2B2B2B"/>
+                </a:solidFill>
+                <a:latin typeface="Calibri"/>
               </a:rPr>
               <a:t>•  One bean for each yes (13 min)</a:t>
             </a:r>
@@ -9215,7 +9215,7 @@
     <p:bg>
       <p:bgPr>
         <a:solidFill>
-          <a:srgbClr val="F7F2E9"/>
+          <a:srgbClr val="FFF4E0"/>
         </a:solidFill>
         <a:effectLst/>
       </p:bgPr>
@@ -9257,9 +9257,9 @@
             <a:r>
               <a:rPr sz="1000" b="0">
                 <a:solidFill>
-                  <a:srgbClr val="6B6255"/>
-                </a:solidFill>
-                <a:latin typeface="Arial"/>
+                  <a:srgbClr val="2B2B2B"/>
+                </a:solidFill>
+                <a:latin typeface="Calibri"/>
               </a:rPr>
               <a:t>R-D1-19   ·   Poster R-P07</a:t>
             </a:r>
@@ -9296,9 +9296,9 @@
             <a:r>
               <a:rPr sz="1000" b="0">
                 <a:solidFill>
-                  <a:srgbClr val="6B6255"/>
-                </a:solidFill>
-                <a:latin typeface="Arial"/>
+                  <a:srgbClr val="2B2B2B"/>
+                </a:solidFill>
+                <a:latin typeface="Calibri"/>
               </a:rPr>
               <a:t>Farmer Money</a:t>
             </a:r>
@@ -9335,9 +9335,9 @@
             <a:r>
               <a:rPr sz="3800" b="1">
                 <a:solidFill>
-                  <a:srgbClr val="1F4D2B"/>
-                </a:solidFill>
-                <a:latin typeface="Georgia"/>
+                  <a:srgbClr val="2B2B2B"/>
+                </a:solidFill>
+                <a:latin typeface="Arial Rounded MT Bold"/>
               </a:rPr>
               <a:t>Keep your money safe</a:t>
             </a:r>
@@ -9359,7 +9359,7 @@
             <a:avLst/>
           </a:prstGeom>
           <a:solidFill>
-            <a:srgbClr val="E2D8C4"/>
+            <a:srgbClr val="E0664A"/>
           </a:solidFill>
           <a:ln>
             <a:noFill/>
@@ -9418,9 +9418,9 @@
             <a:r>
               <a:rPr sz="2800" b="0">
                 <a:solidFill>
-                  <a:srgbClr val="20190F"/>
-                </a:solidFill>
-                <a:latin typeface="Arial"/>
+                  <a:srgbClr val="2B2B2B"/>
+                </a:solidFill>
+                <a:latin typeface="Calibri"/>
               </a:rPr>
               <a:t>•  PIN and OTP: tell nobody</a:t>
             </a:r>
@@ -9434,9 +9434,9 @@
             <a:r>
               <a:rPr sz="2800" b="0">
                 <a:solidFill>
-                  <a:srgbClr val="20190F"/>
-                </a:solidFill>
-                <a:latin typeface="Arial"/>
+                  <a:srgbClr val="2B2B2B"/>
+                </a:solidFill>
+                <a:latin typeface="Calibri"/>
               </a:rPr>
               <a:t>•  Nobody keeps your card</a:t>
             </a:r>
@@ -9450,9 +9450,9 @@
             <a:r>
               <a:rPr sz="2800" b="0">
                 <a:solidFill>
-                  <a:srgbClr val="20190F"/>
-                </a:solidFill>
-                <a:latin typeface="Arial"/>
+                  <a:srgbClr val="2B2B2B"/>
+                </a:solidFill>
+                <a:latin typeface="Calibri"/>
               </a:rPr>
               <a:t>•  Too good? It's a scam</a:t>
             </a:r>
@@ -9474,11 +9474,11 @@
             <a:avLst/>
           </a:prstGeom>
           <a:solidFill>
-            <a:srgbClr val="FBF6EC"/>
+            <a:srgbClr val="FFF4E0"/>
           </a:solidFill>
           <a:ln w="15875">
             <a:solidFill>
-              <a:srgbClr val="E2D8C4"/>
+              <a:srgbClr val="E0664A"/>
             </a:solidFill>
           </a:ln>
           <a:effectLst/>
@@ -9535,9 +9535,9 @@
             <a:r>
               <a:rPr sz="1200" b="1">
                 <a:solidFill>
-                  <a:srgbClr val="C07A1E"/>
-                </a:solidFill>
-                <a:latin typeface="Arial"/>
+                  <a:srgbClr val="2A8C82"/>
+                </a:solidFill>
+                <a:latin typeface="Calibri"/>
               </a:rPr>
               <a:t>POSTER ART · R-P07-ART · coming</a:t>
             </a:r>
@@ -9574,9 +9574,9 @@
             <a:r>
               <a:rPr sz="1800" b="1">
                 <a:solidFill>
-                  <a:srgbClr val="1F4D2B"/>
-                </a:solidFill>
-                <a:latin typeface="Georgia"/>
+                  <a:srgbClr val="2B2B2B"/>
+                </a:solidFill>
+                <a:latin typeface="Arial Rounded MT Bold"/>
               </a:rPr>
               <a:t>Artwork for R-P07 · Keep your money safe</a:t>
             </a:r>
@@ -9613,9 +9613,9 @@
             <a:r>
               <a:rPr sz="1100" b="0">
                 <a:solidFill>
-                  <a:srgbClr val="20190F"/>
-                </a:solidFill>
-                <a:latin typeface="Arial"/>
+                  <a:srgbClr val="2B2B2B"/>
+                </a:solidFill>
+                <a:latin typeface="Calibri"/>
               </a:rPr>
               <a:t>Five small scenes around a central shield shape. ① An older woman holding her bank card close, lips closed, a small shadowy figure behind her trying to peer. ② A hand cupped over an ATM keypad. ③ A phone ringing, with a warning triangle, and a hand refusing (palm out). ④ A big shiny gift box with a fish hook hanging from it. ⑤ A shop counter where a card…</a:t>
             </a:r>
@@ -9636,7 +9636,7 @@
     <p:bg>
       <p:bgPr>
         <a:solidFill>
-          <a:srgbClr val="F7F2E9"/>
+          <a:srgbClr val="FFF4E0"/>
         </a:solidFill>
         <a:effectLst/>
       </p:bgPr>
@@ -9678,9 +9678,9 @@
             <a:r>
               <a:rPr sz="1000" b="0">
                 <a:solidFill>
-                  <a:srgbClr val="6B6255"/>
-                </a:solidFill>
-                <a:latin typeface="Arial"/>
+                  <a:srgbClr val="2B2B2B"/>
+                </a:solidFill>
+                <a:latin typeface="Calibri"/>
               </a:rPr>
               <a:t>R-D1-02</a:t>
             </a:r>
@@ -9717,9 +9717,9 @@
             <a:r>
               <a:rPr sz="1000" b="0">
                 <a:solidFill>
-                  <a:srgbClr val="6B6255"/>
-                </a:solidFill>
-                <a:latin typeface="Arial"/>
+                  <a:srgbClr val="2B2B2B"/>
+                </a:solidFill>
+                <a:latin typeface="Calibri"/>
               </a:rPr>
               <a:t>Farmer Money</a:t>
             </a:r>
@@ -9756,9 +9756,9 @@
             <a:r>
               <a:rPr sz="3800" b="1">
                 <a:solidFill>
-                  <a:srgbClr val="1F4D2B"/>
-                </a:solidFill>
-                <a:latin typeface="Georgia"/>
+                  <a:srgbClr val="2B2B2B"/>
+                </a:solidFill>
+                <a:latin typeface="Arial Rounded MT Bold"/>
               </a:rPr>
               <a:t>Today</a:t>
             </a:r>
@@ -9780,7 +9780,7 @@
             <a:avLst/>
           </a:prstGeom>
           <a:solidFill>
-            <a:srgbClr val="E2D8C4"/>
+            <a:srgbClr val="E0664A"/>
           </a:solidFill>
           <a:ln>
             <a:noFill/>
@@ -9839,9 +9839,9 @@
             <a:r>
               <a:rPr sz="2400" b="0">
                 <a:solidFill>
-                  <a:srgbClr val="20190F"/>
-                </a:solidFill>
-                <a:latin typeface="Arial"/>
+                  <a:srgbClr val="2B2B2B"/>
+                </a:solidFill>
+                <a:latin typeface="Calibri"/>
               </a:rPr>
               <a:t>•  Where money comes from and goes</a:t>
             </a:r>
@@ -9855,9 +9855,9 @@
             <a:r>
               <a:rPr sz="2400" b="0">
                 <a:solidFill>
-                  <a:srgbClr val="20190F"/>
-                </a:solidFill>
-                <a:latin typeface="Arial"/>
+                  <a:srgbClr val="2B2B2B"/>
+                </a:solidFill>
+                <a:latin typeface="Calibri"/>
               </a:rPr>
               <a:t>•  Plan it, save it, keep it safe</a:t>
             </a:r>
@@ -9871,9 +9871,9 @@
             <a:r>
               <a:rPr sz="2400" b="0">
                 <a:solidFill>
-                  <a:srgbClr val="20190F"/>
-                </a:solidFill>
-                <a:latin typeface="Arial"/>
+                  <a:srgbClr val="2B2B2B"/>
+                </a:solidFill>
+                <a:latin typeface="Calibri"/>
               </a:rPr>
               <a:t>•  Groups of 5, same all course</a:t>
             </a:r>
@@ -9895,11 +9895,11 @@
             <a:avLst/>
           </a:prstGeom>
           <a:solidFill>
-            <a:srgbClr val="FBF6EC"/>
+            <a:srgbClr val="FFF4E0"/>
           </a:solidFill>
           <a:ln w="15875">
             <a:solidFill>
-              <a:srgbClr val="E2D8C4"/>
+              <a:srgbClr val="E0664A"/>
             </a:solidFill>
           </a:ln>
           <a:effectLst/>
@@ -9956,9 +9956,9 @@
             <a:r>
               <a:rPr sz="1200" b="1">
                 <a:solidFill>
-                  <a:srgbClr val="C07A1E"/>
-                </a:solidFill>
-                <a:latin typeface="Arial"/>
+                  <a:srgbClr val="2A8C82"/>
+                </a:solidFill>
+                <a:latin typeface="Calibri"/>
               </a:rPr>
               <a:t>IMAGE · R-IMG-01 · coming</a:t>
             </a:r>
@@ -9995,9 +9995,9 @@
             <a:r>
               <a:rPr sz="1800" b="1">
                 <a:solidFill>
-                  <a:srgbClr val="1F4D2B"/>
-                </a:solidFill>
-                <a:latin typeface="Georgia"/>
+                  <a:srgbClr val="2B2B2B"/>
+                </a:solidFill>
+                <a:latin typeface="Arial Rounded MT Bold"/>
               </a:rPr>
               <a:t>The three families</a:t>
             </a:r>
@@ -10034,9 +10034,9 @@
             <a:r>
               <a:rPr sz="1100" b="0">
                 <a:solidFill>
-                  <a:srgbClr val="20190F"/>
-                </a:solidFill>
-                <a:latin typeface="Arial"/>
+                  <a:srgbClr val="2B2B2B"/>
+                </a:solidFill>
+                <a:latin typeface="Calibri"/>
               </a:rPr>
               <a:t>Three side-by-side scenes, equal width, one per family, same style, a thin Hairline divider between them. **Left — the Dlamini household (rural KZN):** a rondavel and a small block house on a green hillside; a 2 500 ℓ plastic water tank beside the house; trench beds with leafy greens, cabbages and a row of maize. A grandmother (70s, headscarf, cardigan)…</a:t>
             </a:r>
@@ -10057,7 +10057,7 @@
     <p:bg>
       <p:bgPr>
         <a:solidFill>
-          <a:srgbClr val="F7F2E9"/>
+          <a:srgbClr val="FFF4E0"/>
         </a:solidFill>
         <a:effectLst/>
       </p:bgPr>
@@ -10099,9 +10099,9 @@
             <a:r>
               <a:rPr sz="1000" b="0">
                 <a:solidFill>
-                  <a:srgbClr val="6B6255"/>
-                </a:solidFill>
-                <a:latin typeface="Arial"/>
+                  <a:srgbClr val="2B2B2B"/>
+                </a:solidFill>
+                <a:latin typeface="Calibri"/>
               </a:rPr>
               <a:t>R-D1-20</a:t>
             </a:r>
@@ -10138,9 +10138,9 @@
             <a:r>
               <a:rPr sz="1000" b="0">
                 <a:solidFill>
-                  <a:srgbClr val="6B6255"/>
-                </a:solidFill>
-                <a:latin typeface="Arial"/>
+                  <a:srgbClr val="2B2B2B"/>
+                </a:solidFill>
+                <a:latin typeface="Calibri"/>
               </a:rPr>
               <a:t>Farmer Money</a:t>
             </a:r>
@@ -10162,7 +10162,7 @@
             <a:avLst/>
           </a:prstGeom>
           <a:solidFill>
-            <a:srgbClr val="C07A1E"/>
+            <a:srgbClr val="2A8C82"/>
           </a:solidFill>
           <a:ln>
             <a:noFill/>
@@ -10221,9 +10221,9 @@
             <a:r>
               <a:rPr sz="1400" b="1">
                 <a:solidFill>
-                  <a:srgbClr val="F7F2E9"/>
-                </a:solidFill>
-                <a:latin typeface="Arial"/>
+                  <a:srgbClr val="FFF4E0"/>
+                </a:solidFill>
+                <a:latin typeface="Calibri"/>
               </a:rPr>
               <a:t>YOUR TURN</a:t>
             </a:r>
@@ -10260,9 +10260,9 @@
             <a:r>
               <a:rPr sz="3800" b="1">
                 <a:solidFill>
-                  <a:srgbClr val="1F4D2B"/>
-                </a:solidFill>
-                <a:latin typeface="Georgia"/>
+                  <a:srgbClr val="2B2B2B"/>
+                </a:solidFill>
+                <a:latin typeface="Arial Rounded MT Bold"/>
               </a:rPr>
               <a:t>Scam or safe?</a:t>
             </a:r>
@@ -10284,7 +10284,7 @@
             <a:avLst/>
           </a:prstGeom>
           <a:solidFill>
-            <a:srgbClr val="E2D8C4"/>
+            <a:srgbClr val="E0664A"/>
           </a:solidFill>
           <a:ln>
             <a:noFill/>
@@ -10343,9 +10343,9 @@
             <a:r>
               <a:rPr sz="3000" b="1">
                 <a:solidFill>
-                  <a:srgbClr val="20190F"/>
-                </a:solidFill>
-                <a:latin typeface="Arial"/>
+                  <a:srgbClr val="2B2B2B"/>
+                </a:solidFill>
+                <a:latin typeface="Calibri"/>
               </a:rPr>
               <a:t>•  Listen to the card</a:t>
             </a:r>
@@ -10359,9 +10359,9 @@
             <a:r>
               <a:rPr sz="3000" b="1">
                 <a:solidFill>
-                  <a:srgbClr val="20190F"/>
-                </a:solidFill>
-                <a:latin typeface="Arial"/>
+                  <a:srgbClr val="2B2B2B"/>
+                </a:solidFill>
+                <a:latin typeface="Calibri"/>
               </a:rPr>
               <a:t>•  Red = scam · Green = safe</a:t>
             </a:r>
@@ -10375,9 +10375,9 @@
             <a:r>
               <a:rPr sz="3000" b="1">
                 <a:solidFill>
-                  <a:srgbClr val="20190F"/>
-                </a:solidFill>
-                <a:latin typeface="Arial"/>
+                  <a:srgbClr val="2B2B2B"/>
+                </a:solidFill>
+                <a:latin typeface="Calibri"/>
               </a:rPr>
               <a:t>•  Say why</a:t>
             </a:r>
@@ -10399,11 +10399,11 @@
             <a:avLst/>
           </a:prstGeom>
           <a:solidFill>
-            <a:srgbClr val="FBF6EC"/>
+            <a:srgbClr val="FFF4E0"/>
           </a:solidFill>
           <a:ln w="15875">
             <a:solidFill>
-              <a:srgbClr val="E2D8C4"/>
+              <a:srgbClr val="E0664A"/>
             </a:solidFill>
           </a:ln>
           <a:effectLst/>
@@ -10460,9 +10460,9 @@
             <a:r>
               <a:rPr sz="1200" b="1">
                 <a:solidFill>
-                  <a:srgbClr val="C07A1E"/>
-                </a:solidFill>
-                <a:latin typeface="Arial"/>
+                  <a:srgbClr val="2A8C82"/>
+                </a:solidFill>
+                <a:latin typeface="Calibri"/>
               </a:rPr>
               <a:t>IMAGE · R-IMG-04 · coming</a:t>
             </a:r>
@@ -10499,9 +10499,9 @@
             <a:r>
               <a:rPr sz="1800" b="1">
                 <a:solidFill>
-                  <a:srgbClr val="1F4D2B"/>
-                </a:solidFill>
-                <a:latin typeface="Georgia"/>
+                  <a:srgbClr val="2B2B2B"/>
+                </a:solidFill>
+                <a:latin typeface="Arial Rounded MT Bold"/>
               </a:rPr>
               <a:t>A scam message on a phone</a:t>
             </a:r>
@@ -10538,9 +10538,9 @@
             <a:r>
               <a:rPr sz="1100" b="0">
                 <a:solidFill>
-                  <a:srgbClr val="20190F"/>
-                </a:solidFill>
-                <a:latin typeface="Arial"/>
+                  <a:srgbClr val="2B2B2B"/>
+                </a:solidFill>
+                <a:latin typeface="Calibri"/>
               </a:rPr>
               <a:t>Close-up of an older woman's hand holding a plain smartphone. The screen shows an empty message bubble (blank — the words are typeset on the slide) and a bright warning triangle above it. Her other hand is raised, palm out, refusing. Background: a kitchen with a tin on a shelf. A small shadowy silhouette appears inside the phone screen corner (the…</a:t>
             </a:r>
@@ -10561,7 +10561,7 @@
     <p:bg>
       <p:bgPr>
         <a:solidFill>
-          <a:srgbClr val="F7F2E9"/>
+          <a:srgbClr val="FFF4E0"/>
         </a:solidFill>
         <a:effectLst/>
       </p:bgPr>
@@ -10603,9 +10603,9 @@
             <a:r>
               <a:rPr sz="1000" b="0">
                 <a:solidFill>
-                  <a:srgbClr val="6B6255"/>
-                </a:solidFill>
-                <a:latin typeface="Arial"/>
+                  <a:srgbClr val="2B2B2B"/>
+                </a:solidFill>
+                <a:latin typeface="Calibri"/>
               </a:rPr>
               <a:t>R-D1-21   ·   Poster R-P05</a:t>
             </a:r>
@@ -10642,9 +10642,9 @@
             <a:r>
               <a:rPr sz="1000" b="0">
                 <a:solidFill>
-                  <a:srgbClr val="6B6255"/>
-                </a:solidFill>
-                <a:latin typeface="Arial"/>
+                  <a:srgbClr val="2B2B2B"/>
+                </a:solidFill>
+                <a:latin typeface="Calibri"/>
               </a:rPr>
               <a:t>Farmer Money</a:t>
             </a:r>
@@ -10681,9 +10681,9 @@
             <a:r>
               <a:rPr sz="3800" b="1">
                 <a:solidFill>
-                  <a:srgbClr val="1F4D2B"/>
-                </a:solidFill>
-                <a:latin typeface="Georgia"/>
+                  <a:srgbClr val="2B2B2B"/>
+                </a:solidFill>
+                <a:latin typeface="Arial Rounded MT Bold"/>
               </a:rPr>
               <a:t>Take home</a:t>
             </a:r>
@@ -10705,7 +10705,7 @@
             <a:avLst/>
           </a:prstGeom>
           <a:solidFill>
-            <a:srgbClr val="E2D8C4"/>
+            <a:srgbClr val="E0664A"/>
           </a:solidFill>
           <a:ln>
             <a:noFill/>
@@ -10764,9 +10764,9 @@
             <a:r>
               <a:rPr sz="2800" b="0">
                 <a:solidFill>
-                  <a:srgbClr val="20190F"/>
-                </a:solidFill>
-                <a:latin typeface="Arial"/>
+                  <a:srgbClr val="2B2B2B"/>
+                </a:solidFill>
+                <a:latin typeface="Calibri"/>
               </a:rPr>
               <a:t>•  Label three tins tonight</a:t>
             </a:r>
@@ -10780,9 +10780,9 @@
             <a:r>
               <a:rPr sz="2800" b="0">
                 <a:solidFill>
-                  <a:srgbClr val="20190F"/>
-                </a:solidFill>
-                <a:latin typeface="Arial"/>
+                  <a:srgbClr val="2B2B2B"/>
+                </a:solidFill>
+                <a:latin typeface="Calibri"/>
               </a:rPr>
               <a:t>•  Change a weak PIN</a:t>
             </a:r>
@@ -10796,9 +10796,9 @@
             <a:r>
               <a:rPr sz="2800" b="0">
                 <a:solidFill>
-                  <a:srgbClr val="20190F"/>
-                </a:solidFill>
-                <a:latin typeface="Arial"/>
+                  <a:srgbClr val="2B2B2B"/>
+                </a:solidFill>
+                <a:latin typeface="Calibri"/>
               </a:rPr>
               <a:t>•  Money back: count it all</a:t>
             </a:r>
@@ -10820,11 +10820,11 @@
             <a:avLst/>
           </a:prstGeom>
           <a:solidFill>
-            <a:srgbClr val="FBF6EC"/>
+            <a:srgbClr val="FFF4E0"/>
           </a:solidFill>
           <a:ln w="15875">
             <a:solidFill>
-              <a:srgbClr val="E2D8C4"/>
+              <a:srgbClr val="E0664A"/>
             </a:solidFill>
           </a:ln>
           <a:effectLst/>
@@ -10881,9 +10881,9 @@
             <a:r>
               <a:rPr sz="1200" b="1">
                 <a:solidFill>
-                  <a:srgbClr val="C07A1E"/>
-                </a:solidFill>
-                <a:latin typeface="Arial"/>
+                  <a:srgbClr val="2A8C82"/>
+                </a:solidFill>
+                <a:latin typeface="Calibri"/>
               </a:rPr>
               <a:t>POSTER ART · R-P05-ART · coming</a:t>
             </a:r>
@@ -10920,9 +10920,9 @@
             <a:r>
               <a:rPr sz="1800" b="1">
                 <a:solidFill>
-                  <a:srgbClr val="1F4D2B"/>
-                </a:solidFill>
-                <a:latin typeface="Georgia"/>
+                  <a:srgbClr val="2B2B2B"/>
+                </a:solidFill>
+                <a:latin typeface="Arial Rounded MT Bold"/>
               </a:rPr>
               <a:t>Artwork for R-P05 · Three tins</a:t>
             </a:r>
@@ -10959,9 +10959,9 @@
             <a:r>
               <a:rPr sz="1100" b="0">
                 <a:solidFill>
-                  <a:srgbClr val="20190F"/>
-                </a:solidFill>
-                <a:latin typeface="Arial"/>
+                  <a:srgbClr val="2B2B2B"/>
+                </a:solidFill>
+                <a:latin typeface="Calibri"/>
               </a:rPr>
               <a:t>Three large, identical tins with lids on a shelf. Each has a simple painted icon: ① a house ② a padlock ③ a seedling. ④ From the left, a hand holds coins just received for a bunch of spinach (the bunch is in the other hand of a buyer at the edge) and drops them into the **seedling tin first**; from the seedling tin, two curved arrows lead to the house…</a:t>
             </a:r>
@@ -10982,7 +10982,7 @@
     <p:bg>
       <p:bgPr>
         <a:solidFill>
-          <a:srgbClr val="F7F2E9"/>
+          <a:srgbClr val="FFF4E0"/>
         </a:solidFill>
         <a:effectLst/>
       </p:bgPr>
@@ -11024,9 +11024,9 @@
             <a:r>
               <a:rPr sz="1000" b="0">
                 <a:solidFill>
-                  <a:srgbClr val="6B6255"/>
-                </a:solidFill>
-                <a:latin typeface="Arial"/>
+                  <a:srgbClr val="2B2B2B"/>
+                </a:solidFill>
+                <a:latin typeface="Calibri"/>
               </a:rPr>
               <a:t>R-D1-03   ·   Poster R-P01</a:t>
             </a:r>
@@ -11063,9 +11063,9 @@
             <a:r>
               <a:rPr sz="1000" b="0">
                 <a:solidFill>
-                  <a:srgbClr val="6B6255"/>
-                </a:solidFill>
-                <a:latin typeface="Arial"/>
+                  <a:srgbClr val="2B2B2B"/>
+                </a:solidFill>
+                <a:latin typeface="Calibri"/>
               </a:rPr>
               <a:t>Farmer Money</a:t>
             </a:r>
@@ -11102,9 +11102,9 @@
             <a:r>
               <a:rPr sz="3800" b="1">
                 <a:solidFill>
-                  <a:srgbClr val="1F4D2B"/>
-                </a:solidFill>
-                <a:latin typeface="Georgia"/>
+                  <a:srgbClr val="2B2B2B"/>
+                </a:solidFill>
+                <a:latin typeface="Arial Rounded MT Bold"/>
               </a:rPr>
               <a:t>Our money agreement</a:t>
             </a:r>
@@ -11126,7 +11126,7 @@
             <a:avLst/>
           </a:prstGeom>
           <a:solidFill>
-            <a:srgbClr val="E2D8C4"/>
+            <a:srgbClr val="E0664A"/>
           </a:solidFill>
           <a:ln>
             <a:noFill/>
@@ -11185,9 +11185,9 @@
             <a:r>
               <a:rPr sz="2800" b="0">
                 <a:solidFill>
-                  <a:srgbClr val="20190F"/>
-                </a:solidFill>
-                <a:latin typeface="Arial"/>
+                  <a:srgbClr val="2B2B2B"/>
+                </a:solidFill>
+                <a:latin typeface="Calibri"/>
               </a:rPr>
               <a:t>•  Made-up families only</a:t>
             </a:r>
@@ -11201,9 +11201,9 @@
             <a:r>
               <a:rPr sz="2800" b="0">
                 <a:solidFill>
-                  <a:srgbClr val="20190F"/>
-                </a:solidFill>
-                <a:latin typeface="Arial"/>
+                  <a:srgbClr val="2B2B2B"/>
+                </a:solidFill>
+                <a:latin typeface="Calibri"/>
               </a:rPr>
               <a:t>•  You may pass · it stays here</a:t>
             </a:r>
@@ -11217,9 +11217,9 @@
             <a:r>
               <a:rPr sz="2800" b="0">
                 <a:solidFill>
-                  <a:srgbClr val="20190F"/>
-                </a:solidFill>
-                <a:latin typeface="Arial"/>
+                  <a:srgbClr val="2B2B2B"/>
+                </a:solidFill>
+                <a:latin typeface="Calibri"/>
               </a:rPr>
               <a:t>•  No selling in this room</a:t>
             </a:r>
@@ -11240,7 +11240,7 @@
     <p:bg>
       <p:bgPr>
         <a:solidFill>
-          <a:srgbClr val="F7F2E9"/>
+          <a:srgbClr val="FFF4E0"/>
         </a:solidFill>
         <a:effectLst/>
       </p:bgPr>
@@ -11282,9 +11282,9 @@
             <a:r>
               <a:rPr sz="1000" b="0">
                 <a:solidFill>
-                  <a:srgbClr val="6B6255"/>
-                </a:solidFill>
-                <a:latin typeface="Arial"/>
+                  <a:srgbClr val="2B2B2B"/>
+                </a:solidFill>
+                <a:latin typeface="Calibri"/>
               </a:rPr>
               <a:t>R-D1-04</a:t>
             </a:r>
@@ -11321,9 +11321,9 @@
             <a:r>
               <a:rPr sz="1000" b="0">
                 <a:solidFill>
-                  <a:srgbClr val="6B6255"/>
-                </a:solidFill>
-                <a:latin typeface="Arial"/>
+                  <a:srgbClr val="2B2B2B"/>
+                </a:solidFill>
+                <a:latin typeface="Calibri"/>
               </a:rPr>
               <a:t>Farmer Money</a:t>
             </a:r>
@@ -11360,9 +11360,9 @@
             <a:r>
               <a:rPr sz="3800" b="1">
                 <a:solidFill>
-                  <a:srgbClr val="1F4D2B"/>
-                </a:solidFill>
-                <a:latin typeface="Georgia"/>
+                  <a:srgbClr val="2B2B2B"/>
+                </a:solidFill>
+                <a:latin typeface="Arial Rounded MT Bold"/>
               </a:rPr>
               <a:t>Meet the three families</a:t>
             </a:r>
@@ -11384,7 +11384,7 @@
             <a:avLst/>
           </a:prstGeom>
           <a:solidFill>
-            <a:srgbClr val="E2D8C4"/>
+            <a:srgbClr val="E0664A"/>
           </a:solidFill>
           <a:ln>
             <a:noFill/>
@@ -11443,9 +11443,9 @@
             <a:r>
               <a:rPr sz="2800" b="0">
                 <a:solidFill>
-                  <a:srgbClr val="20190F"/>
-                </a:solidFill>
-                <a:latin typeface="Arial"/>
+                  <a:srgbClr val="2B2B2B"/>
+                </a:solidFill>
+                <a:latin typeface="Calibri"/>
               </a:rPr>
               <a:t>•  The Dlamini household</a:t>
             </a:r>
@@ -11459,9 +11459,9 @@
             <a:r>
               <a:rPr sz="2800" b="0">
                 <a:solidFill>
-                  <a:srgbClr val="20190F"/>
-                </a:solidFill>
-                <a:latin typeface="Arial"/>
+                  <a:srgbClr val="2B2B2B"/>
+                </a:solidFill>
+                <a:latin typeface="Calibri"/>
               </a:rPr>
               <a:t>•  The Mokoena household</a:t>
             </a:r>
@@ -11475,9 +11475,9 @@
             <a:r>
               <a:rPr sz="2800" b="0">
                 <a:solidFill>
-                  <a:srgbClr val="20190F"/>
-                </a:solidFill>
-                <a:latin typeface="Arial"/>
+                  <a:srgbClr val="2B2B2B"/>
+                </a:solidFill>
+                <a:latin typeface="Calibri"/>
               </a:rPr>
               <a:t>•  Sizanani Youth Garden</a:t>
             </a:r>
@@ -11499,11 +11499,11 @@
             <a:avLst/>
           </a:prstGeom>
           <a:solidFill>
-            <a:srgbClr val="FBF6EC"/>
+            <a:srgbClr val="FFF4E0"/>
           </a:solidFill>
           <a:ln w="15875">
             <a:solidFill>
-              <a:srgbClr val="E2D8C4"/>
+              <a:srgbClr val="E0664A"/>
             </a:solidFill>
           </a:ln>
           <a:effectLst/>
@@ -11560,9 +11560,9 @@
             <a:r>
               <a:rPr sz="1200" b="1">
                 <a:solidFill>
-                  <a:srgbClr val="C07A1E"/>
-                </a:solidFill>
-                <a:latin typeface="Arial"/>
+                  <a:srgbClr val="2A8C82"/>
+                </a:solidFill>
+                <a:latin typeface="Calibri"/>
               </a:rPr>
               <a:t>IMAGE · R-IMG-01 · coming</a:t>
             </a:r>
@@ -11599,9 +11599,9 @@
             <a:r>
               <a:rPr sz="1800" b="1">
                 <a:solidFill>
-                  <a:srgbClr val="1F4D2B"/>
-                </a:solidFill>
-                <a:latin typeface="Georgia"/>
+                  <a:srgbClr val="2B2B2B"/>
+                </a:solidFill>
+                <a:latin typeface="Arial Rounded MT Bold"/>
               </a:rPr>
               <a:t>The three families</a:t>
             </a:r>
@@ -11638,9 +11638,9 @@
             <a:r>
               <a:rPr sz="1100" b="0">
                 <a:solidFill>
-                  <a:srgbClr val="20190F"/>
-                </a:solidFill>
-                <a:latin typeface="Arial"/>
+                  <a:srgbClr val="2B2B2B"/>
+                </a:solidFill>
+                <a:latin typeface="Calibri"/>
               </a:rPr>
               <a:t>Three side-by-side scenes, equal width, one per family, same style, a thin Hairline divider between them. **Left — the Dlamini household (rural KZN):** a rondavel and a small block house on a green hillside; a 2 500 ℓ plastic water tank beside the house; trench beds with leafy greens, cabbages and a row of maize. A grandmother (70s, headscarf, cardigan)…</a:t>
             </a:r>
@@ -11661,7 +11661,7 @@
     <p:bg>
       <p:bgPr>
         <a:solidFill>
-          <a:srgbClr val="F7F2E9"/>
+          <a:srgbClr val="FFF4E0"/>
         </a:solidFill>
         <a:effectLst/>
       </p:bgPr>
@@ -11703,9 +11703,9 @@
             <a:r>
               <a:rPr sz="1000" b="0">
                 <a:solidFill>
-                  <a:srgbClr val="6B6255"/>
-                </a:solidFill>
-                <a:latin typeface="Arial"/>
+                  <a:srgbClr val="2B2B2B"/>
+                </a:solidFill>
+                <a:latin typeface="Calibri"/>
               </a:rPr>
               <a:t>R-D1-05</a:t>
             </a:r>
@@ -11742,9 +11742,9 @@
             <a:r>
               <a:rPr sz="1000" b="0">
                 <a:solidFill>
-                  <a:srgbClr val="6B6255"/>
-                </a:solidFill>
-                <a:latin typeface="Arial"/>
+                  <a:srgbClr val="2B2B2B"/>
+                </a:solidFill>
+                <a:latin typeface="Calibri"/>
               </a:rPr>
               <a:t>Farmer Money</a:t>
             </a:r>
@@ -11766,7 +11766,7 @@
             <a:avLst/>
           </a:prstGeom>
           <a:solidFill>
-            <a:srgbClr val="C07A1E"/>
+            <a:srgbClr val="2A8C82"/>
           </a:solidFill>
           <a:ln>
             <a:noFill/>
@@ -11825,9 +11825,9 @@
             <a:r>
               <a:rPr sz="1400" b="1">
                 <a:solidFill>
-                  <a:srgbClr val="F7F2E9"/>
-                </a:solidFill>
-                <a:latin typeface="Arial"/>
+                  <a:srgbClr val="FFF4E0"/>
+                </a:solidFill>
+                <a:latin typeface="Calibri"/>
               </a:rPr>
               <a:t>YOUR TURN</a:t>
             </a:r>
@@ -11864,9 +11864,9 @@
             <a:r>
               <a:rPr sz="3800" b="1">
                 <a:solidFill>
-                  <a:srgbClr val="1F4D2B"/>
-                </a:solidFill>
-                <a:latin typeface="Georgia"/>
+                  <a:srgbClr val="2B2B2B"/>
+                </a:solidFill>
+                <a:latin typeface="Arial Rounded MT Bold"/>
               </a:rPr>
               <a:t>Picture quiz</a:t>
             </a:r>
@@ -11888,7 +11888,7 @@
             <a:avLst/>
           </a:prstGeom>
           <a:solidFill>
-            <a:srgbClr val="E2D8C4"/>
+            <a:srgbClr val="E0664A"/>
           </a:solidFill>
           <a:ln>
             <a:noFill/>
@@ -11947,9 +11947,9 @@
             <a:r>
               <a:rPr sz="3000" b="1">
                 <a:solidFill>
-                  <a:srgbClr val="20190F"/>
-                </a:solidFill>
-                <a:latin typeface="Arial"/>
+                  <a:srgbClr val="2B2B2B"/>
+                </a:solidFill>
+                <a:latin typeface="Calibri"/>
               </a:rPr>
               <a:t>•  Look at the card</a:t>
             </a:r>
@@ -11963,9 +11963,9 @@
             <a:r>
               <a:rPr sz="3000" b="1">
                 <a:solidFill>
-                  <a:srgbClr val="20190F"/>
-                </a:solidFill>
-                <a:latin typeface="Arial"/>
+                  <a:srgbClr val="2B2B2B"/>
+                </a:solidFill>
+                <a:latin typeface="Calibri"/>
               </a:rPr>
               <a:t>•  Walk to corner A, B or C</a:t>
             </a:r>
@@ -11979,9 +11979,9 @@
             <a:r>
               <a:rPr sz="3000" b="1">
                 <a:solidFill>
-                  <a:srgbClr val="20190F"/>
-                </a:solidFill>
-                <a:latin typeface="Arial"/>
+                  <a:srgbClr val="2B2B2B"/>
+                </a:solidFill>
+                <a:latin typeface="Calibri"/>
               </a:rPr>
               <a:t>•  No reading, no writing</a:t>
             </a:r>
@@ -12003,11 +12003,11 @@
             <a:avLst/>
           </a:prstGeom>
           <a:solidFill>
-            <a:srgbClr val="FBF6EC"/>
+            <a:srgbClr val="FFF4E0"/>
           </a:solidFill>
           <a:ln w="15875">
             <a:solidFill>
-              <a:srgbClr val="E2D8C4"/>
+              <a:srgbClr val="E0664A"/>
             </a:solidFill>
           </a:ln>
           <a:effectLst/>
@@ -12064,9 +12064,9 @@
             <a:r>
               <a:rPr sz="1200" b="1">
                 <a:solidFill>
-                  <a:srgbClr val="C07A1E"/>
-                </a:solidFill>
-                <a:latin typeface="Arial"/>
+                  <a:srgbClr val="2A8C82"/>
+                </a:solidFill>
+                <a:latin typeface="Calibri"/>
               </a:rPr>
               <a:t>IMAGE · R-IMG-20 · coming</a:t>
             </a:r>
@@ -12103,9 +12103,9 @@
             <a:r>
               <a:rPr sz="1800" b="1">
                 <a:solidFill>
-                  <a:srgbClr val="1F4D2B"/>
-                </a:solidFill>
-                <a:latin typeface="Georgia"/>
+                  <a:srgbClr val="2B2B2B"/>
+                </a:solidFill>
+                <a:latin typeface="Arial Rounded MT Bold"/>
               </a:rPr>
               <a:t>Picture quiz cards (8 × 3)</a:t>
             </a:r>
@@ -12142,9 +12142,9 @@
             <a:r>
               <a:rPr sz="1100" b="0">
                 <a:solidFill>
-                  <a:srgbClr val="20190F"/>
-                </a:solidFill>
-                <a:latin typeface="Arial"/>
+                  <a:srgbClr val="2B2B2B"/>
+                </a:solidFill>
+                <a:latin typeface="Calibri"/>
               </a:rPr>
               <a:t>Eight A4 landscape cards, one per quiz question (README table). Each card: a small question picture on the top third, and three answer panels below marked by a **big letter A, B, C typeset by the layout** (the art itself has no letters). 1 · top: coins from a spinach sale; A: coins into a purse with other things; B: coins into a tin beside an open book;…</a:t>
             </a:r>
@@ -12165,7 +12165,7 @@
     <p:bg>
       <p:bgPr>
         <a:solidFill>
-          <a:srgbClr val="1F4D2B"/>
+          <a:srgbClr val="4B2E4F"/>
         </a:solidFill>
         <a:effectLst/>
       </p:bgPr>
@@ -12207,9 +12207,9 @@
             <a:r>
               <a:rPr sz="1000" b="0">
                 <a:solidFill>
-                  <a:srgbClr val="A8D88A"/>
-                </a:solidFill>
-                <a:latin typeface="Arial"/>
+                  <a:srgbClr val="FFF4E0"/>
+                </a:solidFill>
+                <a:latin typeface="Calibri"/>
               </a:rPr>
               <a:t>R-D1-06   ·   Poster R-P02</a:t>
             </a:r>
@@ -12246,9 +12246,9 @@
             <a:r>
               <a:rPr sz="1000" b="0">
                 <a:solidFill>
-                  <a:srgbClr val="A8D88A"/>
-                </a:solidFill>
-                <a:latin typeface="Arial"/>
+                  <a:srgbClr val="FFF4E0"/>
+                </a:solidFill>
+                <a:latin typeface="Calibri"/>
               </a:rPr>
               <a:t>Farmer Money</a:t>
             </a:r>
@@ -12285,9 +12285,9 @@
             <a:r>
               <a:rPr sz="4800" b="1">
                 <a:solidFill>
-                  <a:srgbClr val="F7F2E9"/>
-                </a:solidFill>
-                <a:latin typeface="Georgia"/>
+                  <a:srgbClr val="FFF4E0"/>
+                </a:solidFill>
+                <a:latin typeface="Arial Rounded MT Bold"/>
               </a:rPr>
               <a:t>The money map</a:t>
             </a:r>
@@ -12309,7 +12309,7 @@
             <a:avLst/>
           </a:prstGeom>
           <a:solidFill>
-            <a:srgbClr val="C07A1E"/>
+            <a:srgbClr val="2A8C82"/>
           </a:solidFill>
           <a:ln>
             <a:noFill/>
@@ -12368,9 +12368,9 @@
             <a:r>
               <a:rPr sz="2400" b="0">
                 <a:solidFill>
-                  <a:srgbClr val="A8D88A"/>
-                </a:solidFill>
-                <a:latin typeface="Arial"/>
+                  <a:srgbClr val="FFF4E0"/>
+                </a:solidFill>
+                <a:latin typeface="Calibri"/>
               </a:rPr>
               <a:t>Where does money go?</a:t>
             </a:r>
@@ -12392,11 +12392,11 @@
             <a:avLst/>
           </a:prstGeom>
           <a:solidFill>
-            <a:srgbClr val="FBF6EC"/>
+            <a:srgbClr val="FFF4E0"/>
           </a:solidFill>
           <a:ln w="15875">
             <a:solidFill>
-              <a:srgbClr val="E2D8C4"/>
+              <a:srgbClr val="E0664A"/>
             </a:solidFill>
           </a:ln>
           <a:effectLst/>
@@ -12453,9 +12453,9 @@
             <a:r>
               <a:rPr sz="1200" b="1">
                 <a:solidFill>
-                  <a:srgbClr val="C07A1E"/>
-                </a:solidFill>
-                <a:latin typeface="Arial"/>
+                  <a:srgbClr val="2A8C82"/>
+                </a:solidFill>
+                <a:latin typeface="Calibri"/>
               </a:rPr>
               <a:t>ANIMATION · R-ANI-01 · coming</a:t>
             </a:r>
@@ -12492,9 +12492,9 @@
             <a:r>
               <a:rPr sz="1800" b="1">
                 <a:solidFill>
-                  <a:srgbClr val="1F4D2B"/>
-                </a:solidFill>
-                <a:latin typeface="Georgia"/>
+                  <a:srgbClr val="2B2B2B"/>
+                </a:solidFill>
+                <a:latin typeface="Arial Rounded MT Bold"/>
               </a:rPr>
               <a:t>The leaking bucket</a:t>
             </a:r>
@@ -12531,9 +12531,9 @@
             <a:r>
               <a:rPr sz="1100" b="0">
                 <a:solidFill>
-                  <a:srgbClr val="20190F"/>
-                </a:solidFill>
-                <a:latin typeface="Arial"/>
+                  <a:srgbClr val="2B2B2B"/>
+                </a:solidFill>
+                <a:latin typeface="Calibri"/>
               </a:rPr>
               <a:t>A clear bucket with a tin-roof-house shape printed on its side (no text). Generic coins pour in from a tap at the top (0–4 s). Five holes of different sizes in the bottom; coins trickle out of each into small labelled-by-picture dishes: food basket (biggest stream), taxi, light bulb, phone, sweets (smallest) (4–10 s). A hand places a patch over the…</a:t>
             </a:r>
@@ -12554,7 +12554,7 @@
     <p:bg>
       <p:bgPr>
         <a:solidFill>
-          <a:srgbClr val="F7F2E9"/>
+          <a:srgbClr val="FFF4E0"/>
         </a:solidFill>
         <a:effectLst/>
       </p:bgPr>
@@ -12596,9 +12596,9 @@
             <a:r>
               <a:rPr sz="1000" b="0">
                 <a:solidFill>
-                  <a:srgbClr val="6B6255"/>
-                </a:solidFill>
-                <a:latin typeface="Arial"/>
+                  <a:srgbClr val="2B2B2B"/>
+                </a:solidFill>
+                <a:latin typeface="Calibri"/>
               </a:rPr>
               <a:t>R-D1-07   ·   Poster R-P02</a:t>
             </a:r>
@@ -12635,9 +12635,9 @@
             <a:r>
               <a:rPr sz="1000" b="0">
                 <a:solidFill>
-                  <a:srgbClr val="6B6255"/>
-                </a:solidFill>
-                <a:latin typeface="Arial"/>
+                  <a:srgbClr val="2B2B2B"/>
+                </a:solidFill>
+                <a:latin typeface="Calibri"/>
               </a:rPr>
               <a:t>Farmer Money</a:t>
             </a:r>
@@ -12674,9 +12674,9 @@
             <a:r>
               <a:rPr sz="3800" b="1">
                 <a:solidFill>
-                  <a:srgbClr val="1F4D2B"/>
-                </a:solidFill>
-                <a:latin typeface="Georgia"/>
+                  <a:srgbClr val="2B2B2B"/>
+                </a:solidFill>
+                <a:latin typeface="Arial Rounded MT Bold"/>
               </a:rPr>
               <a:t>In, household, out</a:t>
             </a:r>
@@ -12698,7 +12698,7 @@
             <a:avLst/>
           </a:prstGeom>
           <a:solidFill>
-            <a:srgbClr val="E2D8C4"/>
+            <a:srgbClr val="E0664A"/>
           </a:solidFill>
           <a:ln>
             <a:noFill/>
@@ -12757,9 +12757,9 @@
             <a:r>
               <a:rPr sz="2800" b="0">
                 <a:solidFill>
-                  <a:srgbClr val="20190F"/>
-                </a:solidFill>
-                <a:latin typeface="Arial"/>
+                  <a:srgbClr val="2B2B2B"/>
+                </a:solidFill>
+                <a:latin typeface="Calibri"/>
               </a:rPr>
               <a:t>•  Money comes in</a:t>
             </a:r>
@@ -12773,9 +12773,9 @@
             <a:r>
               <a:rPr sz="2800" b="0">
                 <a:solidFill>
-                  <a:srgbClr val="20190F"/>
-                </a:solidFill>
-                <a:latin typeface="Arial"/>
+                  <a:srgbClr val="2B2B2B"/>
+                </a:solidFill>
+                <a:latin typeface="Calibri"/>
               </a:rPr>
               <a:t>•  Money goes out</a:t>
             </a:r>
@@ -12789,9 +12789,9 @@
             <a:r>
               <a:rPr sz="2800" b="0">
                 <a:solidFill>
-                  <a:srgbClr val="20190F"/>
-                </a:solidFill>
-                <a:latin typeface="Arial"/>
+                  <a:srgbClr val="2B2B2B"/>
+                </a:solidFill>
+                <a:latin typeface="Calibri"/>
               </a:rPr>
               <a:t>•  Small leaks add up</a:t>
             </a:r>
@@ -12813,11 +12813,11 @@
             <a:avLst/>
           </a:prstGeom>
           <a:solidFill>
-            <a:srgbClr val="FBF6EC"/>
+            <a:srgbClr val="FFF4E0"/>
           </a:solidFill>
           <a:ln w="15875">
             <a:solidFill>
-              <a:srgbClr val="E2D8C4"/>
+              <a:srgbClr val="E0664A"/>
             </a:solidFill>
           </a:ln>
           <a:effectLst/>
@@ -12874,9 +12874,9 @@
             <a:r>
               <a:rPr sz="1200" b="1">
                 <a:solidFill>
-                  <a:srgbClr val="C07A1E"/>
-                </a:solidFill>
-                <a:latin typeface="Arial"/>
+                  <a:srgbClr val="2A8C82"/>
+                </a:solidFill>
+                <a:latin typeface="Calibri"/>
               </a:rPr>
               <a:t>POSTER ART · R-P02-ART · coming</a:t>
             </a:r>
@@ -12913,9 +12913,9 @@
             <a:r>
               <a:rPr sz="1800" b="1">
                 <a:solidFill>
-                  <a:srgbClr val="1F4D2B"/>
-                </a:solidFill>
-                <a:latin typeface="Georgia"/>
+                  <a:srgbClr val="2B2B2B"/>
+                </a:solidFill>
+                <a:latin typeface="Arial Rounded MT Bold"/>
               </a:rPr>
               <a:t>Artwork for R-P02 · The money map</a:t>
             </a:r>
@@ -12952,9 +12952,9 @@
             <a:r>
               <a:rPr sz="1100" b="0">
                 <a:solidFill>
-                  <a:srgbClr val="20190F"/>
-                </a:solidFill>
-                <a:latin typeface="Arial"/>
+                  <a:srgbClr val="2B2B2B"/>
+                </a:solidFill>
+                <a:latin typeface="Calibri"/>
               </a:rPr>
               <a:t>A simple house (tin roof, one door) in the centre, drawn like a container with a small coin pile inside. **Left side:** three thick arrows flowing **into** the house from ① a grant card held in an older woman's hand, a hand with a wage packet, and a bunch of spinach being handed over for coins. **Right side:** arrows flowing **out** to ③ a food basket…</a:t>
             </a:r>
@@ -12975,7 +12975,7 @@
     <p:bg>
       <p:bgPr>
         <a:solidFill>
-          <a:srgbClr val="F7F2E9"/>
+          <a:srgbClr val="FFF4E0"/>
         </a:solidFill>
         <a:effectLst/>
       </p:bgPr>
@@ -13017,9 +13017,9 @@
             <a:r>
               <a:rPr sz="1000" b="0">
                 <a:solidFill>
-                  <a:srgbClr val="6B6255"/>
-                </a:solidFill>
-                <a:latin typeface="Arial"/>
+                  <a:srgbClr val="2B2B2B"/>
+                </a:solidFill>
+                <a:latin typeface="Calibri"/>
               </a:rPr>
               <a:t>R-D1-08</a:t>
             </a:r>
@@ -13056,9 +13056,9 @@
             <a:r>
               <a:rPr sz="1000" b="0">
                 <a:solidFill>
-                  <a:srgbClr val="6B6255"/>
-                </a:solidFill>
-                <a:latin typeface="Arial"/>
+                  <a:srgbClr val="2B2B2B"/>
+                </a:solidFill>
+                <a:latin typeface="Calibri"/>
               </a:rPr>
               <a:t>Farmer Money</a:t>
             </a:r>
@@ -13080,7 +13080,7 @@
             <a:avLst/>
           </a:prstGeom>
           <a:solidFill>
-            <a:srgbClr val="C07A1E"/>
+            <a:srgbClr val="2A8C82"/>
           </a:solidFill>
           <a:ln>
             <a:noFill/>
@@ -13139,9 +13139,9 @@
             <a:r>
               <a:rPr sz="1400" b="1">
                 <a:solidFill>
-                  <a:srgbClr val="F7F2E9"/>
-                </a:solidFill>
-                <a:latin typeface="Arial"/>
+                  <a:srgbClr val="FFF4E0"/>
+                </a:solidFill>
+                <a:latin typeface="Calibri"/>
               </a:rPr>
               <a:t>YOUR TURN</a:t>
             </a:r>
@@ -13178,9 +13178,9 @@
             <a:r>
               <a:rPr sz="3800" b="1">
                 <a:solidFill>
-                  <a:srgbClr val="1F4D2B"/>
-                </a:solidFill>
-                <a:latin typeface="Georgia"/>
+                  <a:srgbClr val="2B2B2B"/>
+                </a:solidFill>
+                <a:latin typeface="Arial Rounded MT Bold"/>
               </a:rPr>
               <a:t>Build your family's money map</a:t>
             </a:r>
@@ -13202,7 +13202,7 @@
             <a:avLst/>
           </a:prstGeom>
           <a:solidFill>
-            <a:srgbClr val="E2D8C4"/>
+            <a:srgbClr val="E0664A"/>
           </a:solidFill>
           <a:ln>
             <a:noFill/>
@@ -13261,9 +13261,9 @@
             <a:r>
               <a:rPr sz="3000" b="1">
                 <a:solidFill>
-                  <a:srgbClr val="20190F"/>
-                </a:solidFill>
-                <a:latin typeface="Arial"/>
+                  <a:srgbClr val="2B2B2B"/>
+                </a:solidFill>
+                <a:latin typeface="Calibri"/>
               </a:rPr>
               <a:t>•  Beans in from the left</a:t>
             </a:r>
@@ -13277,9 +13277,9 @@
             <a:r>
               <a:rPr sz="3000" b="1">
                 <a:solidFill>
-                  <a:srgbClr val="20190F"/>
-                </a:solidFill>
-                <a:latin typeface="Arial"/>
+                  <a:srgbClr val="2B2B2B"/>
+                </a:solidFill>
+                <a:latin typeface="Calibri"/>
               </a:rPr>
               <a:t>•  Beans out to the right</a:t>
             </a:r>
@@ -13293,9 +13293,9 @@
             <a:r>
               <a:rPr sz="3000" b="1">
                 <a:solidFill>
-                  <a:srgbClr val="20190F"/>
-                </a:solidFill>
-                <a:latin typeface="Arial"/>
+                  <a:srgbClr val="2B2B2B"/>
+                </a:solidFill>
+                <a:latin typeface="Calibri"/>
               </a:rPr>
               <a:t>•  What is left? (27 min)</a:t>
             </a:r>
@@ -13316,7 +13316,7 @@
     <p:bg>
       <p:bgPr>
         <a:solidFill>
-          <a:srgbClr val="F7F2E9"/>
+          <a:srgbClr val="FFF4E0"/>
         </a:solidFill>
         <a:effectLst/>
       </p:bgPr>
@@ -13358,9 +13358,9 @@
             <a:r>
               <a:rPr sz="1000" b="0">
                 <a:solidFill>
-                  <a:srgbClr val="6B6255"/>
-                </a:solidFill>
-                <a:latin typeface="Arial"/>
+                  <a:srgbClr val="2B2B2B"/>
+                </a:solidFill>
+                <a:latin typeface="Calibri"/>
               </a:rPr>
               <a:t>R-D1-09   ·   Poster R-P03</a:t>
             </a:r>
@@ -13397,9 +13397,9 @@
             <a:r>
               <a:rPr sz="1000" b="0">
                 <a:solidFill>
-                  <a:srgbClr val="6B6255"/>
-                </a:solidFill>
-                <a:latin typeface="Arial"/>
+                  <a:srgbClr val="2B2B2B"/>
+                </a:solidFill>
+                <a:latin typeface="Calibri"/>
               </a:rPr>
               <a:t>Farmer Money</a:t>
             </a:r>
@@ -13436,9 +13436,9 @@
             <a:r>
               <a:rPr sz="3800" b="1">
                 <a:solidFill>
-                  <a:srgbClr val="1F4D2B"/>
-                </a:solidFill>
-                <a:latin typeface="Georgia"/>
+                  <a:srgbClr val="2B2B2B"/>
+                </a:solidFill>
+                <a:latin typeface="Arial Rounded MT Bold"/>
               </a:rPr>
               <a:t>Needs first, wants later</a:t>
             </a:r>
@@ -13460,7 +13460,7 @@
             <a:avLst/>
           </a:prstGeom>
           <a:solidFill>
-            <a:srgbClr val="E2D8C4"/>
+            <a:srgbClr val="E0664A"/>
           </a:solidFill>
           <a:ln>
             <a:noFill/>
@@ -13519,9 +13519,9 @@
             <a:r>
               <a:rPr sz="2800" b="0">
                 <a:solidFill>
-                  <a:srgbClr val="20190F"/>
-                </a:solidFill>
-                <a:latin typeface="Arial"/>
+                  <a:srgbClr val="2B2B2B"/>
+                </a:solidFill>
+                <a:latin typeface="Calibri"/>
               </a:rPr>
               <a:t>•  Need: must have</a:t>
             </a:r>
@@ -13535,9 +13535,9 @@
             <a:r>
               <a:rPr sz="2800" b="0">
                 <a:solidFill>
-                  <a:srgbClr val="20190F"/>
-                </a:solidFill>
-                <a:latin typeface="Arial"/>
+                  <a:srgbClr val="2B2B2B"/>
+                </a:solidFill>
+                <a:latin typeface="Calibri"/>
               </a:rPr>
               <a:t>•  Want: can wait</a:t>
             </a:r>
@@ -13551,9 +13551,9 @@
             <a:r>
               <a:rPr sz="2800" b="0">
                 <a:solidFill>
-                  <a:srgbClr val="20190F"/>
-                </a:solidFill>
-                <a:latin typeface="Arial"/>
+                  <a:srgbClr val="2B2B2B"/>
+                </a:solidFill>
+                <a:latin typeface="Calibri"/>
               </a:rPr>
               <a:t>•  It depends — when?</a:t>
             </a:r>
@@ -13575,11 +13575,11 @@
             <a:avLst/>
           </a:prstGeom>
           <a:solidFill>
-            <a:srgbClr val="FBF6EC"/>
+            <a:srgbClr val="FFF4E0"/>
           </a:solidFill>
           <a:ln w="15875">
             <a:solidFill>
-              <a:srgbClr val="E2D8C4"/>
+              <a:srgbClr val="E0664A"/>
             </a:solidFill>
           </a:ln>
           <a:effectLst/>
@@ -13636,9 +13636,9 @@
             <a:r>
               <a:rPr sz="1200" b="1">
                 <a:solidFill>
-                  <a:srgbClr val="C07A1E"/>
-                </a:solidFill>
-                <a:latin typeface="Arial"/>
+                  <a:srgbClr val="2A8C82"/>
+                </a:solidFill>
+                <a:latin typeface="Calibri"/>
               </a:rPr>
               <a:t>POSTER ART · R-P03-ART · coming</a:t>
             </a:r>
@@ -13675,9 +13675,9 @@
             <a:r>
               <a:rPr sz="1800" b="1">
                 <a:solidFill>
-                  <a:srgbClr val="1F4D2B"/>
-                </a:solidFill>
-                <a:latin typeface="Georgia"/>
+                  <a:srgbClr val="2B2B2B"/>
+                </a:solidFill>
+                <a:latin typeface="Arial Rounded MT Bold"/>
               </a:rPr>
               <a:t>Artwork for R-P03 · Needs first, wants later</a:t>
             </a:r>
@@ -13714,9 +13714,9 @@
             <a:r>
               <a:rPr sz="1100" b="0">
                 <a:solidFill>
-                  <a:srgbClr val="20190F"/>
-                </a:solidFill>
-                <a:latin typeface="Arial"/>
+                  <a:srgbClr val="2B2B2B"/>
+                </a:solidFill>
+                <a:latin typeface="Calibri"/>
               </a:rPr>
               <a:t>A traditional balance scale made of a stick and two woven baskets. ① The lower, heavier basket holds a bag of maize meal, a 20 ℓ water drum, a pair of school shoes, a clinic card, a candle, soap. ② The higher basket holds a takeaway box, a fancy cap, a bag of sweets, a phone showing a game (simple shapes). ③ Between them, hanging from the middle, a plain…</a:t>
             </a:r>
